--- a/Semestre 1/Computer security/Cours/Chapitre 4.pptx
+++ b/Semestre 1/Computer security/Cours/Chapitre 4.pptx
@@ -1,51 +1,51 @@
 
 <file path=ppt/presentation.xml><?xml version="1.0" encoding="utf-8"?>
-<p:presentation xmlns:a="http://schemas.openxmlformats.org/drawingml/2006/main" xmlns:r="http://schemas.openxmlformats.org/officeDocument/2006/relationships" xmlns:p="http://schemas.openxmlformats.org/presentationml/2006/main" saveSubsetFonts="1" autoCompressPictures="0">
+<p:presentation xmlns:a="http://schemas.openxmlformats.org/drawingml/2006/main" xmlns:r="http://schemas.openxmlformats.org/officeDocument/2006/relationships" xmlns:p="http://schemas.openxmlformats.org/presentationml/2006/main" autoCompressPictures="0">
   <p:sldMasterIdLst>
     <p:sldMasterId id="2147483648" r:id="rId1"/>
   </p:sldMasterIdLst>
   <p:notesMasterIdLst>
-    <p:notesMasterId r:id="rId40"/>
+    <p:notesMasterId r:id="rId24"/>
   </p:notesMasterIdLst>
   <p:sldIdLst>
-    <p:sldId id="330" r:id="rId2"/>
-    <p:sldId id="331" r:id="rId3"/>
-    <p:sldId id="332" r:id="rId4"/>
-    <p:sldId id="333" r:id="rId5"/>
-    <p:sldId id="334" r:id="rId6"/>
-    <p:sldId id="340" r:id="rId7"/>
-    <p:sldId id="335" r:id="rId8"/>
-    <p:sldId id="336" r:id="rId9"/>
-    <p:sldId id="337" r:id="rId10"/>
-    <p:sldId id="338" r:id="rId11"/>
-    <p:sldId id="339" r:id="rId12"/>
-    <p:sldId id="329" r:id="rId13"/>
-    <p:sldId id="314" r:id="rId14"/>
-    <p:sldId id="256" r:id="rId15"/>
-    <p:sldId id="315" r:id="rId16"/>
-    <p:sldId id="316" r:id="rId17"/>
-    <p:sldId id="266" r:id="rId18"/>
-    <p:sldId id="318" r:id="rId19"/>
-    <p:sldId id="320" r:id="rId20"/>
-    <p:sldId id="321" r:id="rId21"/>
-    <p:sldId id="317" r:id="rId22"/>
-    <p:sldId id="271" r:id="rId23"/>
-    <p:sldId id="322" r:id="rId24"/>
-    <p:sldId id="319" r:id="rId25"/>
-    <p:sldId id="257" r:id="rId26"/>
-    <p:sldId id="258" r:id="rId27"/>
-    <p:sldId id="323" r:id="rId28"/>
-    <p:sldId id="324" r:id="rId29"/>
-    <p:sldId id="325" r:id="rId30"/>
-    <p:sldId id="259" r:id="rId31"/>
-    <p:sldId id="267" r:id="rId32"/>
-    <p:sldId id="261" r:id="rId33"/>
-    <p:sldId id="268" r:id="rId34"/>
-    <p:sldId id="263" r:id="rId35"/>
-    <p:sldId id="326" r:id="rId36"/>
-    <p:sldId id="265" r:id="rId37"/>
-    <p:sldId id="327" r:id="rId38"/>
-    <p:sldId id="328" r:id="rId39"/>
+    <p:sldId id="330" r:id="rId3"/>
+    <p:sldId id="331" r:id="rId4"/>
+    <p:sldId id="332" r:id="rId5"/>
+    <p:sldId id="333" r:id="rId6"/>
+    <p:sldId id="334" r:id="rId7"/>
+    <p:sldId id="340" r:id="rId8"/>
+    <p:sldId id="335" r:id="rId9"/>
+    <p:sldId id="336" r:id="rId10"/>
+    <p:sldId id="337" r:id="rId11"/>
+    <p:sldId id="338" r:id="rId12"/>
+    <p:sldId id="339" r:id="rId13"/>
+    <p:sldId id="329" r:id="rId14"/>
+    <p:sldId id="314" r:id="rId15"/>
+    <p:sldId id="256" r:id="rId16"/>
+    <p:sldId id="315" r:id="rId17"/>
+    <p:sldId id="316" r:id="rId18"/>
+    <p:sldId id="266" r:id="rId19"/>
+    <p:sldId id="318" r:id="rId20"/>
+    <p:sldId id="320" r:id="rId21"/>
+    <p:sldId id="321" r:id="rId22"/>
+    <p:sldId id="317" r:id="rId23"/>
+    <p:sldId id="271" r:id="rId25"/>
+    <p:sldId id="322" r:id="rId26"/>
+    <p:sldId id="319" r:id="rId27"/>
+    <p:sldId id="257" r:id="rId28"/>
+    <p:sldId id="258" r:id="rId29"/>
+    <p:sldId id="323" r:id="rId30"/>
+    <p:sldId id="324" r:id="rId31"/>
+    <p:sldId id="325" r:id="rId32"/>
+    <p:sldId id="259" r:id="rId33"/>
+    <p:sldId id="267" r:id="rId34"/>
+    <p:sldId id="261" r:id="rId35"/>
+    <p:sldId id="268" r:id="rId36"/>
+    <p:sldId id="263" r:id="rId37"/>
+    <p:sldId id="326" r:id="rId38"/>
+    <p:sldId id="265" r:id="rId39"/>
+    <p:sldId id="327" r:id="rId40"/>
+    <p:sldId id="328" r:id="rId41"/>
   </p:sldIdLst>
   <p:sldSz cx="9144000" cy="6858000" type="screen4x3"/>
   <p:notesSz cx="6858000" cy="9144000"/>
@@ -144,22 +144,6 @@
       </a:defRPr>
     </a:lvl9pPr>
   </p:defaultTextStyle>
-  <p:extLst>
-    <p:ext uri="{EFAFB233-063F-42B5-8137-9DF3F51BA10A}">
-      <p15:sldGuideLst xmlns:p15="http://schemas.microsoft.com/office/powerpoint/2012/main">
-        <p15:guide id="1" orient="horz" pos="2160">
-          <p15:clr>
-            <a:srgbClr val="A4A3A4"/>
-          </p15:clr>
-        </p15:guide>
-        <p15:guide id="2" pos="2880">
-          <p15:clr>
-            <a:srgbClr val="A4A3A4"/>
-          </p15:clr>
-        </p15:guide>
-      </p15:sldGuideLst>
-    </p:ext>
-  </p:extLst>
 </p:presentation>
 </file>
 
@@ -245,7 +229,6 @@
           <a:p>
             <a:fld id="{ED099419-D33D-4A82-BE2B-134C4B0FB51B}" type="datetimeFigureOut">
               <a:rPr lang="fr-FR" smtClean="0"/>
-              <a:t>09/12/2024</a:t>
             </a:fld>
             <a:endParaRPr lang="fr-FR"/>
           </a:p>
@@ -312,6 +295,7 @@
               <a:rPr lang="en-US"/>
               <a:t>Click to edit Master text styles</a:t>
             </a:r>
+            <a:endParaRPr lang="en-US"/>
           </a:p>
           <a:p>
             <a:pPr lvl="1"/>
@@ -319,6 +303,7 @@
               <a:rPr lang="en-US"/>
               <a:t>Second level</a:t>
             </a:r>
+            <a:endParaRPr lang="en-US"/>
           </a:p>
           <a:p>
             <a:pPr lvl="2"/>
@@ -326,6 +311,7 @@
               <a:rPr lang="en-US"/>
               <a:t>Third level</a:t>
             </a:r>
+            <a:endParaRPr lang="en-US"/>
           </a:p>
           <a:p>
             <a:pPr lvl="3"/>
@@ -333,6 +319,7 @@
               <a:rPr lang="en-US"/>
               <a:t>Fourth level</a:t>
             </a:r>
+            <a:endParaRPr lang="en-US"/>
           </a:p>
           <a:p>
             <a:pPr lvl="4"/>
@@ -404,18 +391,12 @@
           <a:p>
             <a:fld id="{157EC2A3-6961-471F-BDCD-B4E47BBE28EE}" type="slidenum">
               <a:rPr lang="fr-FR" smtClean="0"/>
-              <a:t>‹#›</a:t>
             </a:fld>
             <a:endParaRPr lang="fr-FR"/>
           </a:p>
         </p:txBody>
       </p:sp>
     </p:spTree>
-    <p:extLst>
-      <p:ext uri="{BB962C8B-B14F-4D97-AF65-F5344CB8AC3E}">
-        <p14:creationId xmlns:p14="http://schemas.microsoft.com/office/powerpoint/2010/main" val="1734079580"/>
-      </p:ext>
-    </p:extLst>
   </p:cSld>
   <p:clrMap bg1="lt1" tx1="dk1" bg2="lt2" tx2="dk2" accent1="accent1" accent2="accent2" accent3="accent3" accent4="accent4" accent5="accent5" accent6="accent6" hlink="hlink" folHlink="folHlink"/>
   <p:notesStyle>
@@ -590,18 +571,12 @@
           <a:p>
             <a:fld id="{157EC2A3-6961-471F-BDCD-B4E47BBE28EE}" type="slidenum">
               <a:rPr lang="fr-FR" smtClean="0"/>
-              <a:t>21</a:t>
             </a:fld>
             <a:endParaRPr lang="fr-FR"/>
           </a:p>
         </p:txBody>
       </p:sp>
     </p:spTree>
-    <p:extLst>
-      <p:ext uri="{BB962C8B-B14F-4D97-AF65-F5344CB8AC3E}">
-        <p14:creationId xmlns:p14="http://schemas.microsoft.com/office/powerpoint/2010/main" val="2824605068"/>
-      </p:ext>
-    </p:extLst>
   </p:cSld>
   <p:clrMapOvr>
     <a:masterClrMapping/>
@@ -674,18 +649,12 @@
           <a:p>
             <a:fld id="{157EC2A3-6961-471F-BDCD-B4E47BBE28EE}" type="slidenum">
               <a:rPr lang="fr-FR" smtClean="0"/>
-              <a:t>22</a:t>
             </a:fld>
             <a:endParaRPr lang="fr-FR"/>
           </a:p>
         </p:txBody>
       </p:sp>
     </p:spTree>
-    <p:extLst>
-      <p:ext uri="{BB962C8B-B14F-4D97-AF65-F5344CB8AC3E}">
-        <p14:creationId xmlns:p14="http://schemas.microsoft.com/office/powerpoint/2010/main" val="3622217894"/>
-      </p:ext>
-    </p:extLst>
   </p:cSld>
   <p:clrMapOvr>
     <a:masterClrMapping/>
@@ -758,18 +727,12 @@
           <a:p>
             <a:fld id="{157EC2A3-6961-471F-BDCD-B4E47BBE28EE}" type="slidenum">
               <a:rPr lang="fr-FR" smtClean="0"/>
-              <a:t>26</a:t>
             </a:fld>
             <a:endParaRPr lang="fr-FR"/>
           </a:p>
         </p:txBody>
       </p:sp>
     </p:spTree>
-    <p:extLst>
-      <p:ext uri="{BB962C8B-B14F-4D97-AF65-F5344CB8AC3E}">
-        <p14:creationId xmlns:p14="http://schemas.microsoft.com/office/powerpoint/2010/main" val="269508708"/>
-      </p:ext>
-    </p:extLst>
   </p:cSld>
   <p:clrMapOvr>
     <a:masterClrMapping/>
@@ -848,6 +811,7 @@
               <a:rPr lang="fr-FR" dirty="0"/>
               <a:t> : Identifiant pour associer le ping à sa réponse.</a:t>
             </a:r>
+            <a:endParaRPr lang="fr-FR" dirty="0"/>
           </a:p>
           <a:p>
             <a:r>
@@ -862,6 +826,7 @@
               <a:rPr lang="fr-FR" dirty="0"/>
               <a:t> : Numéro de séquence pour suivre les paquets.</a:t>
             </a:r>
+            <a:endParaRPr lang="fr-FR" dirty="0"/>
           </a:p>
           <a:p>
             <a:r>
@@ -876,6 +841,7 @@
               <a:rPr lang="fr-FR" dirty="0"/>
               <a:t> : Champ inutilisé, vide par défaut.</a:t>
             </a:r>
+            <a:endParaRPr lang="fr-FR" dirty="0"/>
           </a:p>
         </p:txBody>
       </p:sp>
@@ -896,18 +862,12 @@
           <a:p>
             <a:fld id="{379E8836-2AB2-4AD1-BEE7-1B0691689C4F}" type="slidenum">
               <a:rPr lang="fr-FR" smtClean="0"/>
-              <a:t>29</a:t>
             </a:fld>
             <a:endParaRPr lang="fr-FR"/>
           </a:p>
         </p:txBody>
       </p:sp>
     </p:spTree>
-    <p:extLst>
-      <p:ext uri="{BB962C8B-B14F-4D97-AF65-F5344CB8AC3E}">
-        <p14:creationId xmlns:p14="http://schemas.microsoft.com/office/powerpoint/2010/main" val="2476200308"/>
-      </p:ext>
-    </p:extLst>
   </p:cSld>
   <p:clrMapOvr>
     <a:masterClrMapping/>
@@ -956,6 +916,7 @@
               <a:rPr lang="en-US"/>
               <a:t>Click to edit Master title style</a:t>
             </a:r>
+            <a:endParaRPr lang="en-US"/>
           </a:p>
         </p:txBody>
       </p:sp>
@@ -1074,6 +1035,7 @@
               <a:rPr lang="en-US"/>
               <a:t>Click to edit Master subtitle style</a:t>
             </a:r>
+            <a:endParaRPr lang="en-US"/>
           </a:p>
         </p:txBody>
       </p:sp>
@@ -1094,7 +1056,6 @@
           <a:p>
             <a:fld id="{5BCAD085-E8A6-8845-BD4E-CB4CCA059FC4}" type="datetimeFigureOut">
               <a:rPr lang="en-US" smtClean="0"/>
-              <a:t>12/9/2024</a:t>
             </a:fld>
             <a:endParaRPr lang="en-US"/>
           </a:p>
@@ -1136,18 +1097,12 @@
           <a:p>
             <a:fld id="{C1FF6DA9-008F-8B48-92A6-B652298478BF}" type="slidenum">
               <a:rPr lang="en-US" smtClean="0"/>
-              <a:t>‹#›</a:t>
             </a:fld>
             <a:endParaRPr lang="en-US"/>
           </a:p>
         </p:txBody>
       </p:sp>
     </p:spTree>
-    <p:extLst>
-      <p:ext uri="{BB962C8B-B14F-4D97-AF65-F5344CB8AC3E}">
-        <p14:creationId xmlns:p14="http://schemas.microsoft.com/office/powerpoint/2010/main" val="3168075583"/>
-      </p:ext>
-    </p:extLst>
   </p:cSld>
   <p:clrMapOvr>
     <a:masterClrMapping/>
@@ -1191,6 +1146,7 @@
               <a:rPr lang="en-US"/>
               <a:t>Click to edit Master title style</a:t>
             </a:r>
+            <a:endParaRPr lang="en-US"/>
           </a:p>
         </p:txBody>
       </p:sp>
@@ -1214,6 +1170,7 @@
               <a:rPr lang="en-US"/>
               <a:t>Click to edit Master text styles</a:t>
             </a:r>
+            <a:endParaRPr lang="en-US"/>
           </a:p>
           <a:p>
             <a:pPr lvl="1"/>
@@ -1221,6 +1178,7 @@
               <a:rPr lang="en-US"/>
               <a:t>Second level</a:t>
             </a:r>
+            <a:endParaRPr lang="en-US"/>
           </a:p>
           <a:p>
             <a:pPr lvl="2"/>
@@ -1228,6 +1186,7 @@
               <a:rPr lang="en-US"/>
               <a:t>Third level</a:t>
             </a:r>
+            <a:endParaRPr lang="en-US"/>
           </a:p>
           <a:p>
             <a:pPr lvl="3"/>
@@ -1235,6 +1194,7 @@
               <a:rPr lang="en-US"/>
               <a:t>Fourth level</a:t>
             </a:r>
+            <a:endParaRPr lang="en-US"/>
           </a:p>
           <a:p>
             <a:pPr lvl="4"/>
@@ -1242,6 +1202,7 @@
               <a:rPr lang="en-US"/>
               <a:t>Fifth level</a:t>
             </a:r>
+            <a:endParaRPr lang="en-US"/>
           </a:p>
         </p:txBody>
       </p:sp>
@@ -1262,7 +1223,6 @@
           <a:p>
             <a:fld id="{5BCAD085-E8A6-8845-BD4E-CB4CCA059FC4}" type="datetimeFigureOut">
               <a:rPr lang="en-US" smtClean="0"/>
-              <a:t>12/9/2024</a:t>
             </a:fld>
             <a:endParaRPr lang="en-US"/>
           </a:p>
@@ -1304,18 +1264,12 @@
           <a:p>
             <a:fld id="{C1FF6DA9-008F-8B48-92A6-B652298478BF}" type="slidenum">
               <a:rPr lang="en-US" smtClean="0"/>
-              <a:t>‹#›</a:t>
             </a:fld>
             <a:endParaRPr lang="en-US"/>
           </a:p>
         </p:txBody>
       </p:sp>
     </p:spTree>
-    <p:extLst>
-      <p:ext uri="{BB962C8B-B14F-4D97-AF65-F5344CB8AC3E}">
-        <p14:creationId xmlns:p14="http://schemas.microsoft.com/office/powerpoint/2010/main" val="2910927964"/>
-      </p:ext>
-    </p:extLst>
   </p:cSld>
   <p:clrMapOvr>
     <a:masterClrMapping/>
@@ -1364,6 +1318,7 @@
               <a:rPr lang="en-US"/>
               <a:t>Click to edit Master title style</a:t>
             </a:r>
+            <a:endParaRPr lang="en-US"/>
           </a:p>
         </p:txBody>
       </p:sp>
@@ -1392,6 +1347,7 @@
               <a:rPr lang="en-US"/>
               <a:t>Click to edit Master text styles</a:t>
             </a:r>
+            <a:endParaRPr lang="en-US"/>
           </a:p>
           <a:p>
             <a:pPr lvl="1"/>
@@ -1399,6 +1355,7 @@
               <a:rPr lang="en-US"/>
               <a:t>Second level</a:t>
             </a:r>
+            <a:endParaRPr lang="en-US"/>
           </a:p>
           <a:p>
             <a:pPr lvl="2"/>
@@ -1406,6 +1363,7 @@
               <a:rPr lang="en-US"/>
               <a:t>Third level</a:t>
             </a:r>
+            <a:endParaRPr lang="en-US"/>
           </a:p>
           <a:p>
             <a:pPr lvl="3"/>
@@ -1413,6 +1371,7 @@
               <a:rPr lang="en-US"/>
               <a:t>Fourth level</a:t>
             </a:r>
+            <a:endParaRPr lang="en-US"/>
           </a:p>
           <a:p>
             <a:pPr lvl="4"/>
@@ -1420,6 +1379,7 @@
               <a:rPr lang="en-US"/>
               <a:t>Fifth level</a:t>
             </a:r>
+            <a:endParaRPr lang="en-US"/>
           </a:p>
         </p:txBody>
       </p:sp>
@@ -1440,7 +1400,6 @@
           <a:p>
             <a:fld id="{5BCAD085-E8A6-8845-BD4E-CB4CCA059FC4}" type="datetimeFigureOut">
               <a:rPr lang="en-US" smtClean="0"/>
-              <a:t>12/9/2024</a:t>
             </a:fld>
             <a:endParaRPr lang="en-US"/>
           </a:p>
@@ -1482,18 +1441,12 @@
           <a:p>
             <a:fld id="{C1FF6DA9-008F-8B48-92A6-B652298478BF}" type="slidenum">
               <a:rPr lang="en-US" smtClean="0"/>
-              <a:t>‹#›</a:t>
             </a:fld>
             <a:endParaRPr lang="en-US"/>
           </a:p>
         </p:txBody>
       </p:sp>
     </p:spTree>
-    <p:extLst>
-      <p:ext uri="{BB962C8B-B14F-4D97-AF65-F5344CB8AC3E}">
-        <p14:creationId xmlns:p14="http://schemas.microsoft.com/office/powerpoint/2010/main" val="3612223792"/>
-      </p:ext>
-    </p:extLst>
   </p:cSld>
   <p:clrMapOvr>
     <a:masterClrMapping/>
@@ -1743,6 +1696,13 @@
               </a:rPr>
               <a:t>Computer Security</a:t>
             </a:r>
+            <a:endParaRPr lang="en-US" sz="1200" dirty="0">
+              <a:solidFill>
+                <a:schemeClr val="bg1"/>
+              </a:solidFill>
+              <a:latin typeface="+mn-lt"/>
+              <a:cs typeface="+mn-cs"/>
+            </a:endParaRPr>
           </a:p>
         </p:txBody>
       </p:sp>
@@ -1753,7 +1713,7 @@
             <a:spLocks noGrp="1"/>
           </p:cNvSpPr>
           <p:nvPr>
-            <p:ph idx="1"/>
+            <p:ph idx="1" hasCustomPrompt="1"/>
           </p:nvPr>
         </p:nvSpPr>
         <p:spPr>
@@ -1768,17 +1728,11 @@
             <a:lvl1pPr>
               <a:buSzPct val="60000"/>
               <a:buFontTx/>
-              <a:buBlip>
-                <a:blip/>
-              </a:buBlip>
               <a:defRPr/>
             </a:lvl1pPr>
             <a:lvl2pPr>
               <a:buSzPct val="60000"/>
               <a:buFontTx/>
-              <a:buBlip>
-                <a:blip/>
-              </a:buBlip>
               <a:defRPr/>
             </a:lvl2pPr>
           </a:lstStyle>
@@ -1788,6 +1742,7 @@
               <a:rPr lang="fr-FR"/>
               <a:t>Modifiez les styles du texte du masque</a:t>
             </a:r>
+            <a:endParaRPr lang="fr-FR"/>
           </a:p>
           <a:p>
             <a:pPr lvl="1"/>
@@ -1795,6 +1750,7 @@
               <a:rPr lang="fr-FR"/>
               <a:t>Deuxième niveau</a:t>
             </a:r>
+            <a:endParaRPr lang="fr-FR"/>
           </a:p>
           <a:p>
             <a:pPr lvl="2"/>
@@ -1802,6 +1758,7 @@
               <a:rPr lang="fr-FR"/>
               <a:t>Troisième niveau</a:t>
             </a:r>
+            <a:endParaRPr lang="fr-FR"/>
           </a:p>
           <a:p>
             <a:pPr lvl="3"/>
@@ -1809,6 +1766,7 @@
               <a:rPr lang="fr-FR"/>
               <a:t>Quatrième niveau</a:t>
             </a:r>
+            <a:endParaRPr lang="fr-FR"/>
           </a:p>
           <a:p>
             <a:pPr lvl="4"/>
@@ -1889,7 +1847,6 @@
             </a:pPr>
             <a:fld id="{F00185C5-B452-4085-9905-BE947635FA3C}" type="datetime1">
               <a:rPr lang="en-US" smtClean="0"/>
-              <a:t>12/9/2024</a:t>
             </a:fld>
             <a:endParaRPr lang="en-US"/>
           </a:p>
@@ -1967,21 +1924,12 @@
             </a:pPr>
             <a:fld id="{5BC7FEBF-A170-470C-A369-F0D066FB58E5}" type="slidenum">
               <a:rPr lang="en-US"/>
-              <a:pPr>
-                <a:defRPr/>
-              </a:pPr>
-              <a:t>‹#›</a:t>
             </a:fld>
             <a:endParaRPr lang="en-US"/>
           </a:p>
         </p:txBody>
       </p:sp>
     </p:spTree>
-    <p:extLst>
-      <p:ext uri="{BB962C8B-B14F-4D97-AF65-F5344CB8AC3E}">
-        <p14:creationId xmlns:p14="http://schemas.microsoft.com/office/powerpoint/2010/main" val="2829457918"/>
-      </p:ext>
-    </p:extLst>
   </p:cSld>
   <p:clrMapOvr>
     <a:masterClrMapping/>
@@ -2025,6 +1973,7 @@
               <a:rPr lang="en-US"/>
               <a:t>Click to edit Master title style</a:t>
             </a:r>
+            <a:endParaRPr lang="en-US"/>
           </a:p>
         </p:txBody>
       </p:sp>
@@ -2048,6 +1997,7 @@
               <a:rPr lang="en-US"/>
               <a:t>Click to edit Master text styles</a:t>
             </a:r>
+            <a:endParaRPr lang="en-US"/>
           </a:p>
           <a:p>
             <a:pPr lvl="1"/>
@@ -2055,6 +2005,7 @@
               <a:rPr lang="en-US"/>
               <a:t>Second level</a:t>
             </a:r>
+            <a:endParaRPr lang="en-US"/>
           </a:p>
           <a:p>
             <a:pPr lvl="2"/>
@@ -2062,6 +2013,7 @@
               <a:rPr lang="en-US"/>
               <a:t>Third level</a:t>
             </a:r>
+            <a:endParaRPr lang="en-US"/>
           </a:p>
           <a:p>
             <a:pPr lvl="3"/>
@@ -2069,6 +2021,7 @@
               <a:rPr lang="en-US"/>
               <a:t>Fourth level</a:t>
             </a:r>
+            <a:endParaRPr lang="en-US"/>
           </a:p>
           <a:p>
             <a:pPr lvl="4"/>
@@ -2076,6 +2029,7 @@
               <a:rPr lang="en-US"/>
               <a:t>Fifth level</a:t>
             </a:r>
+            <a:endParaRPr lang="en-US"/>
           </a:p>
         </p:txBody>
       </p:sp>
@@ -2096,7 +2050,6 @@
           <a:p>
             <a:fld id="{5BCAD085-E8A6-8845-BD4E-CB4CCA059FC4}" type="datetimeFigureOut">
               <a:rPr lang="en-US" smtClean="0"/>
-              <a:t>12/9/2024</a:t>
             </a:fld>
             <a:endParaRPr lang="en-US"/>
           </a:p>
@@ -2138,18 +2091,12 @@
           <a:p>
             <a:fld id="{C1FF6DA9-008F-8B48-92A6-B652298478BF}" type="slidenum">
               <a:rPr lang="en-US" smtClean="0"/>
-              <a:t>‹#›</a:t>
             </a:fld>
             <a:endParaRPr lang="en-US"/>
           </a:p>
         </p:txBody>
       </p:sp>
     </p:spTree>
-    <p:extLst>
-      <p:ext uri="{BB962C8B-B14F-4D97-AF65-F5344CB8AC3E}">
-        <p14:creationId xmlns:p14="http://schemas.microsoft.com/office/powerpoint/2010/main" val="2614314258"/>
-      </p:ext>
-    </p:extLst>
   </p:cSld>
   <p:clrMapOvr>
     <a:masterClrMapping/>
@@ -2202,6 +2149,7 @@
               <a:rPr lang="en-US"/>
               <a:t>Click to edit Master title style</a:t>
             </a:r>
+            <a:endParaRPr lang="en-US"/>
           </a:p>
         </p:txBody>
       </p:sp>
@@ -2321,6 +2269,7 @@
               <a:rPr lang="en-US"/>
               <a:t>Click to edit Master text styles</a:t>
             </a:r>
+            <a:endParaRPr lang="en-US"/>
           </a:p>
         </p:txBody>
       </p:sp>
@@ -2341,7 +2290,6 @@
           <a:p>
             <a:fld id="{5BCAD085-E8A6-8845-BD4E-CB4CCA059FC4}" type="datetimeFigureOut">
               <a:rPr lang="en-US" smtClean="0"/>
-              <a:t>12/9/2024</a:t>
             </a:fld>
             <a:endParaRPr lang="en-US"/>
           </a:p>
@@ -2383,18 +2331,12 @@
           <a:p>
             <a:fld id="{C1FF6DA9-008F-8B48-92A6-B652298478BF}" type="slidenum">
               <a:rPr lang="en-US" smtClean="0"/>
-              <a:t>‹#›</a:t>
             </a:fld>
             <a:endParaRPr lang="en-US"/>
           </a:p>
         </p:txBody>
       </p:sp>
     </p:spTree>
-    <p:extLst>
-      <p:ext uri="{BB962C8B-B14F-4D97-AF65-F5344CB8AC3E}">
-        <p14:creationId xmlns:p14="http://schemas.microsoft.com/office/powerpoint/2010/main" val="960648375"/>
-      </p:ext>
-    </p:extLst>
   </p:cSld>
   <p:clrMapOvr>
     <a:masterClrMapping/>
@@ -2438,6 +2380,7 @@
               <a:rPr lang="en-US"/>
               <a:t>Click to edit Master title style</a:t>
             </a:r>
+            <a:endParaRPr lang="en-US"/>
           </a:p>
         </p:txBody>
       </p:sp>
@@ -2494,6 +2437,7 @@
               <a:rPr lang="en-US"/>
               <a:t>Click to edit Master text styles</a:t>
             </a:r>
+            <a:endParaRPr lang="en-US"/>
           </a:p>
           <a:p>
             <a:pPr lvl="1"/>
@@ -2501,6 +2445,7 @@
               <a:rPr lang="en-US"/>
               <a:t>Second level</a:t>
             </a:r>
+            <a:endParaRPr lang="en-US"/>
           </a:p>
           <a:p>
             <a:pPr lvl="2"/>
@@ -2508,6 +2453,7 @@
               <a:rPr lang="en-US"/>
               <a:t>Third level</a:t>
             </a:r>
+            <a:endParaRPr lang="en-US"/>
           </a:p>
           <a:p>
             <a:pPr lvl="3"/>
@@ -2515,6 +2461,7 @@
               <a:rPr lang="en-US"/>
               <a:t>Fourth level</a:t>
             </a:r>
+            <a:endParaRPr lang="en-US"/>
           </a:p>
           <a:p>
             <a:pPr lvl="4"/>
@@ -2522,6 +2469,7 @@
               <a:rPr lang="en-US"/>
               <a:t>Fifth level</a:t>
             </a:r>
+            <a:endParaRPr lang="en-US"/>
           </a:p>
         </p:txBody>
       </p:sp>
@@ -2578,6 +2526,7 @@
               <a:rPr lang="en-US"/>
               <a:t>Click to edit Master text styles</a:t>
             </a:r>
+            <a:endParaRPr lang="en-US"/>
           </a:p>
           <a:p>
             <a:pPr lvl="1"/>
@@ -2585,6 +2534,7 @@
               <a:rPr lang="en-US"/>
               <a:t>Second level</a:t>
             </a:r>
+            <a:endParaRPr lang="en-US"/>
           </a:p>
           <a:p>
             <a:pPr lvl="2"/>
@@ -2592,6 +2542,7 @@
               <a:rPr lang="en-US"/>
               <a:t>Third level</a:t>
             </a:r>
+            <a:endParaRPr lang="en-US"/>
           </a:p>
           <a:p>
             <a:pPr lvl="3"/>
@@ -2599,6 +2550,7 @@
               <a:rPr lang="en-US"/>
               <a:t>Fourth level</a:t>
             </a:r>
+            <a:endParaRPr lang="en-US"/>
           </a:p>
           <a:p>
             <a:pPr lvl="4"/>
@@ -2606,6 +2558,7 @@
               <a:rPr lang="en-US"/>
               <a:t>Fifth level</a:t>
             </a:r>
+            <a:endParaRPr lang="en-US"/>
           </a:p>
         </p:txBody>
       </p:sp>
@@ -2626,7 +2579,6 @@
           <a:p>
             <a:fld id="{5BCAD085-E8A6-8845-BD4E-CB4CCA059FC4}" type="datetimeFigureOut">
               <a:rPr lang="en-US" smtClean="0"/>
-              <a:t>12/9/2024</a:t>
             </a:fld>
             <a:endParaRPr lang="en-US"/>
           </a:p>
@@ -2668,18 +2620,12 @@
           <a:p>
             <a:fld id="{C1FF6DA9-008F-8B48-92A6-B652298478BF}" type="slidenum">
               <a:rPr lang="en-US" smtClean="0"/>
-              <a:t>‹#›</a:t>
             </a:fld>
             <a:endParaRPr lang="en-US"/>
           </a:p>
         </p:txBody>
       </p:sp>
     </p:spTree>
-    <p:extLst>
-      <p:ext uri="{BB962C8B-B14F-4D97-AF65-F5344CB8AC3E}">
-        <p14:creationId xmlns:p14="http://schemas.microsoft.com/office/powerpoint/2010/main" val="2782244947"/>
-      </p:ext>
-    </p:extLst>
   </p:cSld>
   <p:clrMapOvr>
     <a:masterClrMapping/>
@@ -2727,6 +2673,7 @@
               <a:rPr lang="en-US"/>
               <a:t>Click to edit Master title style</a:t>
             </a:r>
+            <a:endParaRPr lang="en-US"/>
           </a:p>
         </p:txBody>
       </p:sp>
@@ -2792,6 +2739,7 @@
               <a:rPr lang="en-US"/>
               <a:t>Click to edit Master text styles</a:t>
             </a:r>
+            <a:endParaRPr lang="en-US"/>
           </a:p>
         </p:txBody>
       </p:sp>
@@ -2848,6 +2796,7 @@
               <a:rPr lang="en-US"/>
               <a:t>Click to edit Master text styles</a:t>
             </a:r>
+            <a:endParaRPr lang="en-US"/>
           </a:p>
           <a:p>
             <a:pPr lvl="1"/>
@@ -2855,6 +2804,7 @@
               <a:rPr lang="en-US"/>
               <a:t>Second level</a:t>
             </a:r>
+            <a:endParaRPr lang="en-US"/>
           </a:p>
           <a:p>
             <a:pPr lvl="2"/>
@@ -2862,6 +2812,7 @@
               <a:rPr lang="en-US"/>
               <a:t>Third level</a:t>
             </a:r>
+            <a:endParaRPr lang="en-US"/>
           </a:p>
           <a:p>
             <a:pPr lvl="3"/>
@@ -2869,6 +2820,7 @@
               <a:rPr lang="en-US"/>
               <a:t>Fourth level</a:t>
             </a:r>
+            <a:endParaRPr lang="en-US"/>
           </a:p>
           <a:p>
             <a:pPr lvl="4"/>
@@ -2876,6 +2828,7 @@
               <a:rPr lang="en-US"/>
               <a:t>Fifth level</a:t>
             </a:r>
+            <a:endParaRPr lang="en-US"/>
           </a:p>
         </p:txBody>
       </p:sp>
@@ -2941,6 +2894,7 @@
               <a:rPr lang="en-US"/>
               <a:t>Click to edit Master text styles</a:t>
             </a:r>
+            <a:endParaRPr lang="en-US"/>
           </a:p>
         </p:txBody>
       </p:sp>
@@ -2997,6 +2951,7 @@
               <a:rPr lang="en-US"/>
               <a:t>Click to edit Master text styles</a:t>
             </a:r>
+            <a:endParaRPr lang="en-US"/>
           </a:p>
           <a:p>
             <a:pPr lvl="1"/>
@@ -3004,6 +2959,7 @@
               <a:rPr lang="en-US"/>
               <a:t>Second level</a:t>
             </a:r>
+            <a:endParaRPr lang="en-US"/>
           </a:p>
           <a:p>
             <a:pPr lvl="2"/>
@@ -3011,6 +2967,7 @@
               <a:rPr lang="en-US"/>
               <a:t>Third level</a:t>
             </a:r>
+            <a:endParaRPr lang="en-US"/>
           </a:p>
           <a:p>
             <a:pPr lvl="3"/>
@@ -3018,6 +2975,7 @@
               <a:rPr lang="en-US"/>
               <a:t>Fourth level</a:t>
             </a:r>
+            <a:endParaRPr lang="en-US"/>
           </a:p>
           <a:p>
             <a:pPr lvl="4"/>
@@ -3025,6 +2983,7 @@
               <a:rPr lang="en-US"/>
               <a:t>Fifth level</a:t>
             </a:r>
+            <a:endParaRPr lang="en-US"/>
           </a:p>
         </p:txBody>
       </p:sp>
@@ -3045,7 +3004,6 @@
           <a:p>
             <a:fld id="{5BCAD085-E8A6-8845-BD4E-CB4CCA059FC4}" type="datetimeFigureOut">
               <a:rPr lang="en-US" smtClean="0"/>
-              <a:t>12/9/2024</a:t>
             </a:fld>
             <a:endParaRPr lang="en-US"/>
           </a:p>
@@ -3087,18 +3045,12 @@
           <a:p>
             <a:fld id="{C1FF6DA9-008F-8B48-92A6-B652298478BF}" type="slidenum">
               <a:rPr lang="en-US" smtClean="0"/>
-              <a:t>‹#›</a:t>
             </a:fld>
             <a:endParaRPr lang="en-US"/>
           </a:p>
         </p:txBody>
       </p:sp>
     </p:spTree>
-    <p:extLst>
-      <p:ext uri="{BB962C8B-B14F-4D97-AF65-F5344CB8AC3E}">
-        <p14:creationId xmlns:p14="http://schemas.microsoft.com/office/powerpoint/2010/main" val="990158736"/>
-      </p:ext>
-    </p:extLst>
   </p:cSld>
   <p:clrMapOvr>
     <a:masterClrMapping/>
@@ -3142,6 +3094,7 @@
               <a:rPr lang="en-US"/>
               <a:t>Click to edit Master title style</a:t>
             </a:r>
+            <a:endParaRPr lang="en-US"/>
           </a:p>
         </p:txBody>
       </p:sp>
@@ -3162,7 +3115,6 @@
           <a:p>
             <a:fld id="{5BCAD085-E8A6-8845-BD4E-CB4CCA059FC4}" type="datetimeFigureOut">
               <a:rPr lang="en-US" smtClean="0"/>
-              <a:t>12/9/2024</a:t>
             </a:fld>
             <a:endParaRPr lang="en-US"/>
           </a:p>
@@ -3204,18 +3156,12 @@
           <a:p>
             <a:fld id="{C1FF6DA9-008F-8B48-92A6-B652298478BF}" type="slidenum">
               <a:rPr lang="en-US" smtClean="0"/>
-              <a:t>‹#›</a:t>
             </a:fld>
             <a:endParaRPr lang="en-US"/>
           </a:p>
         </p:txBody>
       </p:sp>
     </p:spTree>
-    <p:extLst>
-      <p:ext uri="{BB962C8B-B14F-4D97-AF65-F5344CB8AC3E}">
-        <p14:creationId xmlns:p14="http://schemas.microsoft.com/office/powerpoint/2010/main" val="727027711"/>
-      </p:ext>
-    </p:extLst>
   </p:cSld>
   <p:clrMapOvr>
     <a:masterClrMapping/>
@@ -3257,7 +3203,6 @@
           <a:p>
             <a:fld id="{5BCAD085-E8A6-8845-BD4E-CB4CCA059FC4}" type="datetimeFigureOut">
               <a:rPr lang="en-US" smtClean="0"/>
-              <a:t>12/9/2024</a:t>
             </a:fld>
             <a:endParaRPr lang="en-US"/>
           </a:p>
@@ -3299,18 +3244,12 @@
           <a:p>
             <a:fld id="{C1FF6DA9-008F-8B48-92A6-B652298478BF}" type="slidenum">
               <a:rPr lang="en-US" smtClean="0"/>
-              <a:t>‹#›</a:t>
             </a:fld>
             <a:endParaRPr lang="en-US"/>
           </a:p>
         </p:txBody>
       </p:sp>
     </p:spTree>
-    <p:extLst>
-      <p:ext uri="{BB962C8B-B14F-4D97-AF65-F5344CB8AC3E}">
-        <p14:creationId xmlns:p14="http://schemas.microsoft.com/office/powerpoint/2010/main" val="1212999818"/>
-      </p:ext>
-    </p:extLst>
   </p:cSld>
   <p:clrMapOvr>
     <a:masterClrMapping/>
@@ -3363,6 +3302,7 @@
               <a:rPr lang="en-US"/>
               <a:t>Click to edit Master title style</a:t>
             </a:r>
+            <a:endParaRPr lang="en-US"/>
           </a:p>
         </p:txBody>
       </p:sp>
@@ -3419,6 +3359,7 @@
               <a:rPr lang="en-US"/>
               <a:t>Click to edit Master text styles</a:t>
             </a:r>
+            <a:endParaRPr lang="en-US"/>
           </a:p>
           <a:p>
             <a:pPr lvl="1"/>
@@ -3426,6 +3367,7 @@
               <a:rPr lang="en-US"/>
               <a:t>Second level</a:t>
             </a:r>
+            <a:endParaRPr lang="en-US"/>
           </a:p>
           <a:p>
             <a:pPr lvl="2"/>
@@ -3433,6 +3375,7 @@
               <a:rPr lang="en-US"/>
               <a:t>Third level</a:t>
             </a:r>
+            <a:endParaRPr lang="en-US"/>
           </a:p>
           <a:p>
             <a:pPr lvl="3"/>
@@ -3440,6 +3383,7 @@
               <a:rPr lang="en-US"/>
               <a:t>Fourth level</a:t>
             </a:r>
+            <a:endParaRPr lang="en-US"/>
           </a:p>
           <a:p>
             <a:pPr lvl="4"/>
@@ -3447,6 +3391,7 @@
               <a:rPr lang="en-US"/>
               <a:t>Fifth level</a:t>
             </a:r>
+            <a:endParaRPr lang="en-US"/>
           </a:p>
         </p:txBody>
       </p:sp>
@@ -3512,6 +3457,7 @@
               <a:rPr lang="en-US"/>
               <a:t>Click to edit Master text styles</a:t>
             </a:r>
+            <a:endParaRPr lang="en-US"/>
           </a:p>
         </p:txBody>
       </p:sp>
@@ -3532,7 +3478,6 @@
           <a:p>
             <a:fld id="{5BCAD085-E8A6-8845-BD4E-CB4CCA059FC4}" type="datetimeFigureOut">
               <a:rPr lang="en-US" smtClean="0"/>
-              <a:t>12/9/2024</a:t>
             </a:fld>
             <a:endParaRPr lang="en-US"/>
           </a:p>
@@ -3574,18 +3519,12 @@
           <a:p>
             <a:fld id="{C1FF6DA9-008F-8B48-92A6-B652298478BF}" type="slidenum">
               <a:rPr lang="en-US" smtClean="0"/>
-              <a:t>‹#›</a:t>
             </a:fld>
             <a:endParaRPr lang="en-US"/>
           </a:p>
         </p:txBody>
       </p:sp>
     </p:spTree>
-    <p:extLst>
-      <p:ext uri="{BB962C8B-B14F-4D97-AF65-F5344CB8AC3E}">
-        <p14:creationId xmlns:p14="http://schemas.microsoft.com/office/powerpoint/2010/main" val="1840726560"/>
-      </p:ext>
-    </p:extLst>
   </p:cSld>
   <p:clrMapOvr>
     <a:masterClrMapping/>
@@ -3638,6 +3577,7 @@
               <a:rPr lang="en-US"/>
               <a:t>Click to edit Master title style</a:t>
             </a:r>
+            <a:endParaRPr lang="en-US"/>
           </a:p>
         </p:txBody>
       </p:sp>
@@ -3764,6 +3704,7 @@
               <a:rPr lang="en-US"/>
               <a:t>Click to edit Master text styles</a:t>
             </a:r>
+            <a:endParaRPr lang="en-US"/>
           </a:p>
         </p:txBody>
       </p:sp>
@@ -3784,7 +3725,6 @@
           <a:p>
             <a:fld id="{5BCAD085-E8A6-8845-BD4E-CB4CCA059FC4}" type="datetimeFigureOut">
               <a:rPr lang="en-US" smtClean="0"/>
-              <a:t>12/9/2024</a:t>
             </a:fld>
             <a:endParaRPr lang="en-US"/>
           </a:p>
@@ -3826,18 +3766,12 @@
           <a:p>
             <a:fld id="{C1FF6DA9-008F-8B48-92A6-B652298478BF}" type="slidenum">
               <a:rPr lang="en-US" smtClean="0"/>
-              <a:t>‹#›</a:t>
             </a:fld>
             <a:endParaRPr lang="en-US"/>
           </a:p>
         </p:txBody>
       </p:sp>
     </p:spTree>
-    <p:extLst>
-      <p:ext uri="{BB962C8B-B14F-4D97-AF65-F5344CB8AC3E}">
-        <p14:creationId xmlns:p14="http://schemas.microsoft.com/office/powerpoint/2010/main" val="3889236939"/>
-      </p:ext>
-    </p:extLst>
   </p:cSld>
   <p:clrMapOvr>
     <a:masterClrMapping/>
@@ -3896,6 +3830,7 @@
               <a:rPr lang="en-US"/>
               <a:t>Click to edit Master title style</a:t>
             </a:r>
+            <a:endParaRPr lang="en-US"/>
           </a:p>
         </p:txBody>
       </p:sp>
@@ -3929,6 +3864,7 @@
               <a:rPr lang="en-US"/>
               <a:t>Click to edit Master text styles</a:t>
             </a:r>
+            <a:endParaRPr lang="en-US"/>
           </a:p>
           <a:p>
             <a:pPr lvl="1"/>
@@ -3936,6 +3872,7 @@
               <a:rPr lang="en-US"/>
               <a:t>Second level</a:t>
             </a:r>
+            <a:endParaRPr lang="en-US"/>
           </a:p>
           <a:p>
             <a:pPr lvl="2"/>
@@ -3943,6 +3880,7 @@
               <a:rPr lang="en-US"/>
               <a:t>Third level</a:t>
             </a:r>
+            <a:endParaRPr lang="en-US"/>
           </a:p>
           <a:p>
             <a:pPr lvl="3"/>
@@ -3950,6 +3888,7 @@
               <a:rPr lang="en-US"/>
               <a:t>Fourth level</a:t>
             </a:r>
+            <a:endParaRPr lang="en-US"/>
           </a:p>
           <a:p>
             <a:pPr lvl="4"/>
@@ -3957,6 +3896,7 @@
               <a:rPr lang="en-US"/>
               <a:t>Fifth level</a:t>
             </a:r>
+            <a:endParaRPr lang="en-US"/>
           </a:p>
         </p:txBody>
       </p:sp>
@@ -3995,7 +3935,6 @@
           <a:p>
             <a:fld id="{5BCAD085-E8A6-8845-BD4E-CB4CCA059FC4}" type="datetimeFigureOut">
               <a:rPr lang="en-US" smtClean="0"/>
-              <a:t>12/9/2024</a:t>
             </a:fld>
             <a:endParaRPr lang="en-US"/>
           </a:p>
@@ -4073,18 +4012,12 @@
           <a:p>
             <a:fld id="{C1FF6DA9-008F-8B48-92A6-B652298478BF}" type="slidenum">
               <a:rPr lang="en-US" smtClean="0"/>
-              <a:t>‹#›</a:t>
             </a:fld>
             <a:endParaRPr lang="en-US"/>
           </a:p>
         </p:txBody>
       </p:sp>
     </p:spTree>
-    <p:extLst>
-      <p:ext uri="{BB962C8B-B14F-4D97-AF65-F5344CB8AC3E}">
-        <p14:creationId xmlns:p14="http://schemas.microsoft.com/office/powerpoint/2010/main" val="2209977519"/>
-      </p:ext>
-    </p:extLst>
   </p:cSld>
   <p:clrMap bg1="lt1" tx1="dk1" bg2="lt2" tx2="dk2" accent1="accent1" accent2="accent2" accent3="accent3" accent4="accent4" accent5="accent5" accent6="accent6" hlink="hlink" folHlink="folHlink"/>
   <p:sldLayoutIdLst>
@@ -4123,7 +4056,7 @@
         <a:spcBef>
           <a:spcPct val="20000"/>
         </a:spcBef>
-        <a:buFont typeface="Arial"/>
+        <a:buFont typeface="Arial" panose="020B0604020202020204"/>
         <a:buChar char="•"/>
         <a:defRPr sz="3200" kern="1200">
           <a:solidFill>
@@ -4138,7 +4071,7 @@
         <a:spcBef>
           <a:spcPct val="20000"/>
         </a:spcBef>
-        <a:buFont typeface="Arial"/>
+        <a:buFont typeface="Arial" panose="020B0604020202020204"/>
         <a:buChar char="–"/>
         <a:defRPr sz="2800" kern="1200">
           <a:solidFill>
@@ -4153,7 +4086,7 @@
         <a:spcBef>
           <a:spcPct val="20000"/>
         </a:spcBef>
-        <a:buFont typeface="Arial"/>
+        <a:buFont typeface="Arial" panose="020B0604020202020204"/>
         <a:buChar char="•"/>
         <a:defRPr sz="2400" kern="1200">
           <a:solidFill>
@@ -4168,7 +4101,7 @@
         <a:spcBef>
           <a:spcPct val="20000"/>
         </a:spcBef>
-        <a:buFont typeface="Arial"/>
+        <a:buFont typeface="Arial" panose="020B0604020202020204"/>
         <a:buChar char="–"/>
         <a:defRPr sz="2000" kern="1200">
           <a:solidFill>
@@ -4183,7 +4116,7 @@
         <a:spcBef>
           <a:spcPct val="20000"/>
         </a:spcBef>
-        <a:buFont typeface="Arial"/>
+        <a:buFont typeface="Arial" panose="020B0604020202020204"/>
         <a:buChar char="»"/>
         <a:defRPr sz="2000" kern="1200">
           <a:solidFill>
@@ -4198,7 +4131,7 @@
         <a:spcBef>
           <a:spcPct val="20000"/>
         </a:spcBef>
-        <a:buFont typeface="Arial"/>
+        <a:buFont typeface="Arial" panose="020B0604020202020204"/>
         <a:buChar char="•"/>
         <a:defRPr sz="2000" kern="1200">
           <a:solidFill>
@@ -4213,7 +4146,7 @@
         <a:spcBef>
           <a:spcPct val="20000"/>
         </a:spcBef>
-        <a:buFont typeface="Arial"/>
+        <a:buFont typeface="Arial" panose="020B0604020202020204"/>
         <a:buChar char="•"/>
         <a:defRPr sz="2000" kern="1200">
           <a:solidFill>
@@ -4228,7 +4161,7 @@
         <a:spcBef>
           <a:spcPct val="20000"/>
         </a:spcBef>
-        <a:buFont typeface="Arial"/>
+        <a:buFont typeface="Arial" panose="020B0604020202020204"/>
         <a:buChar char="•"/>
         <a:defRPr sz="2000" kern="1200">
           <a:solidFill>
@@ -4243,7 +4176,7 @@
         <a:spcBef>
           <a:spcPct val="20000"/>
         </a:spcBef>
-        <a:buFont typeface="Arial"/>
+        <a:buFont typeface="Arial" panose="020B0604020202020204"/>
         <a:buChar char="•"/>
         <a:defRPr sz="2000" kern="1200">
           <a:solidFill>
@@ -4415,13 +4348,7 @@
       </p:sp>
       <p:sp>
         <p:nvSpPr>
-          <p:cNvPr id="4" name="Footer Placeholder 3">
-            <a:extLst>
-              <a:ext uri="{FF2B5EF4-FFF2-40B4-BE49-F238E27FC236}">
-                <a16:creationId xmlns:a16="http://schemas.microsoft.com/office/drawing/2014/main" id="{92E36062-1549-4792-B4DD-EA7A0A90FB35}"/>
-              </a:ext>
-            </a:extLst>
-          </p:cNvPr>
+          <p:cNvPr id="4" name="Footer Placeholder 3"/>
           <p:cNvSpPr>
             <a:spLocks noGrp="1"/>
           </p:cNvSpPr>
@@ -4444,13 +4371,7 @@
       </p:sp>
       <p:sp>
         <p:nvSpPr>
-          <p:cNvPr id="5" name="Slide Number Placeholder 4">
-            <a:extLst>
-              <a:ext uri="{FF2B5EF4-FFF2-40B4-BE49-F238E27FC236}">
-                <a16:creationId xmlns:a16="http://schemas.microsoft.com/office/drawing/2014/main" id="{096D72D5-2AF3-4CE9-993F-9C2F487A7EB2}"/>
-              </a:ext>
-            </a:extLst>
-          </p:cNvPr>
+          <p:cNvPr id="5" name="Slide Number Placeholder 4"/>
           <p:cNvSpPr>
             <a:spLocks noGrp="1"/>
           </p:cNvSpPr>
@@ -4465,7 +4386,6 @@
           <a:p>
             <a:fld id="{E3903F50-6C8B-4DF5-9707-78408FB2F531}" type="slidenum">
               <a:rPr lang="en-US" smtClean="0"/>
-              <a:t>1</a:t>
             </a:fld>
             <a:endParaRPr lang="en-US" dirty="0"/>
           </a:p>
@@ -4515,24 +4435,28 @@
               <a:rPr dirty="0"/>
               <a:t>- IP Spoofing: Impersonating the IP address of a trusted client.</a:t>
             </a:r>
+            <a:endParaRPr dirty="0"/>
           </a:p>
           <a:p>
             <a:r>
               <a:rPr dirty="0"/>
               <a:t>- Sequence Number Prediction: Guessing TCP sequence numbers to inject packets.</a:t>
             </a:r>
+            <a:endParaRPr dirty="0"/>
           </a:p>
           <a:p>
             <a:r>
               <a:rPr dirty="0"/>
               <a:t>- Packet Injection: Sending malicious packets to disrupt or control the session.</a:t>
             </a:r>
+            <a:endParaRPr dirty="0"/>
           </a:p>
           <a:p>
             <a:r>
               <a:rPr dirty="0"/>
               <a:t>- Sniffing Tools: Using tools like Wireshark to capture network traffic.</a:t>
             </a:r>
+            <a:endParaRPr dirty="0"/>
           </a:p>
         </p:txBody>
       </p:sp>
@@ -4555,6 +4479,7 @@
               <a:rPr sz="4000" dirty="0"/>
               <a:t>Techniques Used in TCP Session Hijacking</a:t>
             </a:r>
+            <a:endParaRPr sz="4000" dirty="0"/>
           </a:p>
         </p:txBody>
       </p:sp>
@@ -4602,24 +4527,28 @@
               <a:rPr dirty="0"/>
               <a:t>- Data Theft: Stealing sensitive information during the session.</a:t>
             </a:r>
+            <a:endParaRPr dirty="0"/>
           </a:p>
           <a:p>
             <a:r>
               <a:rPr dirty="0"/>
               <a:t>- Command Execution: Injecting malicious commands.</a:t>
             </a:r>
+            <a:endParaRPr dirty="0"/>
           </a:p>
           <a:p>
             <a:r>
               <a:rPr dirty="0"/>
               <a:t>- Service Disruption: Interrupting legitimate communication.</a:t>
             </a:r>
+            <a:endParaRPr dirty="0"/>
           </a:p>
           <a:p>
             <a:r>
               <a:rPr dirty="0"/>
               <a:t>- Financial Loss: Exploiting online banking sessions or other financial activities.</a:t>
             </a:r>
+            <a:endParaRPr dirty="0"/>
           </a:p>
         </p:txBody>
       </p:sp>
@@ -4734,11 +4663,6 @@
         </p:txBody>
       </p:sp>
     </p:spTree>
-    <p:extLst>
-      <p:ext uri="{BB962C8B-B14F-4D97-AF65-F5344CB8AC3E}">
-        <p14:creationId xmlns:p14="http://schemas.microsoft.com/office/powerpoint/2010/main" val="4236449199"/>
-      </p:ext>
-    </p:extLst>
   </p:cSld>
   <p:clrMapOvr>
     <a:masterClrMapping/>
@@ -4765,13 +4689,7 @@
       </p:grpSpPr>
       <p:sp>
         <p:nvSpPr>
-          <p:cNvPr id="2" name="Content Placeholder 1">
-            <a:extLst>
-              <a:ext uri="{FF2B5EF4-FFF2-40B4-BE49-F238E27FC236}">
-                <a16:creationId xmlns:a16="http://schemas.microsoft.com/office/drawing/2014/main" id="{21DD1138-35FB-474E-A503-DCAC7A9DEB82}"/>
-              </a:ext>
-            </a:extLst>
-          </p:cNvPr>
+          <p:cNvPr id="2" name="Content Placeholder 1"/>
           <p:cNvSpPr>
             <a:spLocks noGrp="1"/>
           </p:cNvSpPr>
@@ -4798,18 +4716,13 @@
               <a:rPr lang="fr-FR" dirty="0"/>
               <a:t>TCP/IP model (Layers/Protocols)</a:t>
             </a:r>
-          </a:p>
-        </p:txBody>
-      </p:sp>
-      <p:sp>
-        <p:nvSpPr>
-          <p:cNvPr id="3" name="Title 2">
-            <a:extLst>
-              <a:ext uri="{FF2B5EF4-FFF2-40B4-BE49-F238E27FC236}">
-                <a16:creationId xmlns:a16="http://schemas.microsoft.com/office/drawing/2014/main" id="{F13B6B10-9115-4CFD-B6FB-2A719DDD4D94}"/>
-              </a:ext>
-            </a:extLst>
-          </p:cNvPr>
+            <a:endParaRPr lang="fr-FR" dirty="0"/>
+          </a:p>
+        </p:txBody>
+      </p:sp>
+      <p:sp>
+        <p:nvSpPr>
+          <p:cNvPr id="3" name="Title 2"/>
           <p:cNvSpPr>
             <a:spLocks noGrp="1"/>
           </p:cNvSpPr>
@@ -4826,18 +4739,13 @@
               <a:rPr lang="fr-FR" dirty="0"/>
               <a:t>TCP/IP Model</a:t>
             </a:r>
-          </a:p>
-        </p:txBody>
-      </p:sp>
-      <p:sp>
-        <p:nvSpPr>
-          <p:cNvPr id="4" name="Footer Placeholder 3">
-            <a:extLst>
-              <a:ext uri="{FF2B5EF4-FFF2-40B4-BE49-F238E27FC236}">
-                <a16:creationId xmlns:a16="http://schemas.microsoft.com/office/drawing/2014/main" id="{AA38280B-E8A4-4271-82BE-BC4B66D0F52D}"/>
-              </a:ext>
-            </a:extLst>
-          </p:cNvPr>
+            <a:endParaRPr lang="fr-FR" dirty="0"/>
+          </a:p>
+        </p:txBody>
+      </p:sp>
+      <p:sp>
+        <p:nvSpPr>
+          <p:cNvPr id="4" name="Footer Placeholder 3"/>
           <p:cNvSpPr>
             <a:spLocks noGrp="1"/>
           </p:cNvSpPr>
@@ -4863,20 +4771,14 @@
       </p:sp>
       <p:pic>
         <p:nvPicPr>
-          <p:cNvPr id="7" name="Picture 6">
-            <a:extLst>
-              <a:ext uri="{FF2B5EF4-FFF2-40B4-BE49-F238E27FC236}">
-                <a16:creationId xmlns:a16="http://schemas.microsoft.com/office/drawing/2014/main" id="{064BC2B2-621C-444A-B7DC-08ADA6B502A6}"/>
-              </a:ext>
-            </a:extLst>
-          </p:cNvPr>
+          <p:cNvPr id="7" name="Picture 6"/>
           <p:cNvPicPr>
             <a:picLocks noChangeAspect="1"/>
           </p:cNvPicPr>
           <p:nvPr/>
         </p:nvPicPr>
         <p:blipFill>
-          <a:blip r:embed="rId2"/>
+          <a:blip r:embed="rId1"/>
           <a:stretch>
             <a:fillRect/>
           </a:stretch>
@@ -4893,13 +4795,7 @@
       </p:pic>
       <p:sp>
         <p:nvSpPr>
-          <p:cNvPr id="6" name="Slide Number Placeholder 5">
-            <a:extLst>
-              <a:ext uri="{FF2B5EF4-FFF2-40B4-BE49-F238E27FC236}">
-                <a16:creationId xmlns:a16="http://schemas.microsoft.com/office/drawing/2014/main" id="{2041249C-72D2-4BF2-80BA-959BB6714422}"/>
-              </a:ext>
-            </a:extLst>
-          </p:cNvPr>
+          <p:cNvPr id="6" name="Slide Number Placeholder 5"/>
           <p:cNvSpPr>
             <a:spLocks noGrp="1"/>
           </p:cNvSpPr>
@@ -4917,10 +4813,6 @@
             </a:pPr>
             <a:fld id="{5BC7FEBF-A170-470C-A369-F0D066FB58E5}" type="slidenum">
               <a:rPr lang="en-US" smtClean="0"/>
-              <a:pPr>
-                <a:defRPr/>
-              </a:pPr>
-              <a:t>13</a:t>
             </a:fld>
             <a:endParaRPr lang="en-US"/>
           </a:p>
@@ -4928,13 +4820,7 @@
       </p:sp>
       <p:sp>
         <p:nvSpPr>
-          <p:cNvPr id="5" name="Oval 4">
-            <a:extLst>
-              <a:ext uri="{FF2B5EF4-FFF2-40B4-BE49-F238E27FC236}">
-                <a16:creationId xmlns:a16="http://schemas.microsoft.com/office/drawing/2014/main" id="{220271FA-B384-4CEC-B29C-C6662F8E6B52}"/>
-              </a:ext>
-            </a:extLst>
-          </p:cNvPr>
+          <p:cNvPr id="5" name="Oval 4"/>
           <p:cNvSpPr/>
           <p:nvPr/>
         </p:nvSpPr>
@@ -4979,16 +4865,8 @@
       </p:sp>
       <p:cxnSp>
         <p:nvCxnSpPr>
-          <p:cNvPr id="9" name="Connector: Curved 8">
-            <a:extLst>
-              <a:ext uri="{FF2B5EF4-FFF2-40B4-BE49-F238E27FC236}">
-                <a16:creationId xmlns:a16="http://schemas.microsoft.com/office/drawing/2014/main" id="{F84A8209-D23C-4073-B46B-7DA33C40CB78}"/>
-              </a:ext>
-            </a:extLst>
-          </p:cNvPr>
-          <p:cNvCxnSpPr>
-            <a:cxnSpLocks/>
-          </p:cNvCxnSpPr>
+          <p:cNvPr id="9" name="Connector: Curved 8"/>
+          <p:cNvCxnSpPr/>
           <p:nvPr/>
         </p:nvCxnSpPr>
         <p:spPr>
@@ -5022,11 +4900,6 @@
         </p:style>
       </p:cxnSp>
     </p:spTree>
-    <p:extLst>
-      <p:ext uri="{BB962C8B-B14F-4D97-AF65-F5344CB8AC3E}">
-        <p14:creationId xmlns:p14="http://schemas.microsoft.com/office/powerpoint/2010/main" val="2986049403"/>
-      </p:ext>
-    </p:extLst>
   </p:cSld>
   <p:clrMapOvr>
     <a:masterClrMapping/>
@@ -5226,6 +5099,7 @@
               <a:rPr dirty="0"/>
               <a:t>Attacks</a:t>
             </a:r>
+            <a:endParaRPr dirty="0"/>
           </a:p>
         </p:txBody>
       </p:sp>
@@ -5275,6 +5149,7 @@
               <a:rPr dirty="0"/>
               <a:t>Introduction to UDP (User Datagram Protocol)</a:t>
             </a:r>
+            <a:endParaRPr dirty="0"/>
           </a:p>
         </p:txBody>
       </p:sp>
@@ -5311,11 +5186,6 @@
         </p:txBody>
       </p:sp>
     </p:spTree>
-    <p:extLst>
-      <p:ext uri="{BB962C8B-B14F-4D97-AF65-F5344CB8AC3E}">
-        <p14:creationId xmlns:p14="http://schemas.microsoft.com/office/powerpoint/2010/main" val="2171550757"/>
-      </p:ext>
-    </p:extLst>
   </p:cSld>
   <p:clrMapOvr>
     <a:masterClrMapping/>
@@ -5369,11 +5239,6 @@
         </p:txBody>
       </p:sp>
     </p:spTree>
-    <p:extLst>
-      <p:ext uri="{BB962C8B-B14F-4D97-AF65-F5344CB8AC3E}">
-        <p14:creationId xmlns:p14="http://schemas.microsoft.com/office/powerpoint/2010/main" val="4041172682"/>
-      </p:ext>
-    </p:extLst>
   </p:cSld>
   <p:clrMapOvr>
     <a:masterClrMapping/>
@@ -5400,13 +5265,7 @@
       </p:grpSpPr>
       <p:sp>
         <p:nvSpPr>
-          <p:cNvPr id="2" name="Title 1">
-            <a:extLst>
-              <a:ext uri="{FF2B5EF4-FFF2-40B4-BE49-F238E27FC236}">
-                <a16:creationId xmlns:a16="http://schemas.microsoft.com/office/drawing/2014/main" id="{30060E73-7801-4561-B630-C31266E9EC8F}"/>
-              </a:ext>
-            </a:extLst>
-          </p:cNvPr>
+          <p:cNvPr id="2" name="Title 1"/>
           <p:cNvSpPr>
             <a:spLocks noGrp="1"/>
           </p:cNvSpPr>
@@ -5430,18 +5289,13 @@
               <a:rPr lang="fr-FR" dirty="0"/>
               <a:t>TCP Header vs UDP Header</a:t>
             </a:r>
+            <a:endParaRPr lang="fr-FR" dirty="0"/>
           </a:p>
         </p:txBody>
       </p:sp>
       <p:pic>
         <p:nvPicPr>
-          <p:cNvPr id="5" name="Content Placeholder 4">
-            <a:extLst>
-              <a:ext uri="{FF2B5EF4-FFF2-40B4-BE49-F238E27FC236}">
-                <a16:creationId xmlns:a16="http://schemas.microsoft.com/office/drawing/2014/main" id="{095095B8-00F6-4E0C-B984-F537CD00A51A}"/>
-              </a:ext>
-            </a:extLst>
-          </p:cNvPr>
+          <p:cNvPr id="5" name="Content Placeholder 4"/>
           <p:cNvPicPr>
             <a:picLocks noGrp="1" noChangeAspect="1"/>
           </p:cNvPicPr>
@@ -5450,7 +5304,7 @@
           </p:nvPr>
         </p:nvPicPr>
         <p:blipFill>
-          <a:blip r:embed="rId2"/>
+          <a:blip r:embed="rId1"/>
           <a:stretch>
             <a:fillRect/>
           </a:stretch>
@@ -5464,20 +5318,14 @@
       </p:pic>
       <p:pic>
         <p:nvPicPr>
-          <p:cNvPr id="7" name="Picture 6">
-            <a:extLst>
-              <a:ext uri="{FF2B5EF4-FFF2-40B4-BE49-F238E27FC236}">
-                <a16:creationId xmlns:a16="http://schemas.microsoft.com/office/drawing/2014/main" id="{6D89FB1F-611F-4B01-947F-848F658FBC07}"/>
-              </a:ext>
-            </a:extLst>
-          </p:cNvPr>
+          <p:cNvPr id="7" name="Picture 6"/>
           <p:cNvPicPr>
             <a:picLocks noChangeAspect="1"/>
           </p:cNvPicPr>
           <p:nvPr/>
         </p:nvPicPr>
         <p:blipFill>
-          <a:blip r:embed="rId3"/>
+          <a:blip r:embed="rId2"/>
           <a:stretch>
             <a:fillRect/>
           </a:stretch>
@@ -5494,13 +5342,7 @@
       </p:pic>
       <p:sp>
         <p:nvSpPr>
-          <p:cNvPr id="8" name="Left Brace 7">
-            <a:extLst>
-              <a:ext uri="{FF2B5EF4-FFF2-40B4-BE49-F238E27FC236}">
-                <a16:creationId xmlns:a16="http://schemas.microsoft.com/office/drawing/2014/main" id="{AA2D7E47-4352-4E45-81B5-E9D95B7C06DC}"/>
-              </a:ext>
-            </a:extLst>
-          </p:cNvPr>
+          <p:cNvPr id="8" name="Left Brace 7"/>
           <p:cNvSpPr/>
           <p:nvPr/>
         </p:nvSpPr>
@@ -5543,13 +5385,7 @@
       </p:sp>
       <p:sp>
         <p:nvSpPr>
-          <p:cNvPr id="9" name="Left Brace 8">
-            <a:extLst>
-              <a:ext uri="{FF2B5EF4-FFF2-40B4-BE49-F238E27FC236}">
-                <a16:creationId xmlns:a16="http://schemas.microsoft.com/office/drawing/2014/main" id="{B867C3CF-E602-48F8-B9AC-6AB00C12AEA1}"/>
-              </a:ext>
-            </a:extLst>
-          </p:cNvPr>
+          <p:cNvPr id="9" name="Left Brace 8"/>
           <p:cNvSpPr/>
           <p:nvPr/>
         </p:nvSpPr>
@@ -5591,11 +5427,6 @@
         </p:txBody>
       </p:sp>
     </p:spTree>
-    <p:extLst>
-      <p:ext uri="{BB962C8B-B14F-4D97-AF65-F5344CB8AC3E}">
-        <p14:creationId xmlns:p14="http://schemas.microsoft.com/office/powerpoint/2010/main" val="1269739723"/>
-      </p:ext>
-    </p:extLst>
   </p:cSld>
   <p:clrMapOvr>
     <a:masterClrMapping/>
@@ -5771,11 +5602,6 @@
         </p:txBody>
       </p:sp>
     </p:spTree>
-    <p:extLst>
-      <p:ext uri="{BB962C8B-B14F-4D97-AF65-F5344CB8AC3E}">
-        <p14:creationId xmlns:p14="http://schemas.microsoft.com/office/powerpoint/2010/main" val="3674087100"/>
-      </p:ext>
-    </p:extLst>
   </p:cSld>
   <p:clrMapOvr>
     <a:masterClrMapping/>
@@ -5884,6 +5710,7 @@
               <a:rPr lang="en-US" dirty="0"/>
               <a:t>. Sends the packet to the receiver.</a:t>
             </a:r>
+            <a:endParaRPr lang="en-US" dirty="0"/>
           </a:p>
           <a:p>
             <a:pPr marL="514350" indent="-514350" algn="just">
@@ -5902,6 +5729,7 @@
               <a:rPr lang="en-US" dirty="0"/>
               <a:t>Routes the packet from sender to receiver using the IP layer. Does not provide feedback to the sender if the packet is lost or delayed.</a:t>
             </a:r>
+            <a:endParaRPr lang="en-US" dirty="0"/>
           </a:p>
           <a:p>
             <a:pPr marL="514350" indent="-514350" algn="just">
@@ -5920,6 +5748,7 @@
               <a:rPr lang="en-US" dirty="0"/>
               <a:t>Listens on the specified port. Processes the packet upon arrival without expecting a formal acknowledgment.</a:t>
             </a:r>
+            <a:endParaRPr lang="en-US" dirty="0"/>
           </a:p>
           <a:p>
             <a:pPr marL="514350" indent="-514350" algn="just">
@@ -5951,11 +5780,6 @@
         </p:txBody>
       </p:sp>
     </p:spTree>
-    <p:extLst>
-      <p:ext uri="{BB962C8B-B14F-4D97-AF65-F5344CB8AC3E}">
-        <p14:creationId xmlns:p14="http://schemas.microsoft.com/office/powerpoint/2010/main" val="2372036169"/>
-      </p:ext>
-    </p:extLst>
   </p:cSld>
   <p:clrMapOvr>
     <a:masterClrMapping/>
@@ -6217,6 +6041,7 @@
               <a:rPr dirty="0"/>
               <a:t>A Man-in-the-Middle (MITM) attack occurs when an attacker intercepts and potentially alters the communication between two parties without their knowledge.</a:t>
             </a:r>
+            <a:endParaRPr dirty="0"/>
           </a:p>
         </p:txBody>
       </p:sp>
@@ -6243,13 +6068,7 @@
       </p:sp>
       <p:sp>
         <p:nvSpPr>
-          <p:cNvPr id="4" name="Footer Placeholder 3">
-            <a:extLst>
-              <a:ext uri="{FF2B5EF4-FFF2-40B4-BE49-F238E27FC236}">
-                <a16:creationId xmlns:a16="http://schemas.microsoft.com/office/drawing/2014/main" id="{9BFD1925-52A8-4305-BFFA-A5D45FE16953}"/>
-              </a:ext>
-            </a:extLst>
-          </p:cNvPr>
+          <p:cNvPr id="4" name="Footer Placeholder 3"/>
           <p:cNvSpPr>
             <a:spLocks noGrp="1"/>
           </p:cNvSpPr>
@@ -6275,13 +6094,7 @@
       </p:sp>
       <p:sp>
         <p:nvSpPr>
-          <p:cNvPr id="5" name="Slide Number Placeholder 4">
-            <a:extLst>
-              <a:ext uri="{FF2B5EF4-FFF2-40B4-BE49-F238E27FC236}">
-                <a16:creationId xmlns:a16="http://schemas.microsoft.com/office/drawing/2014/main" id="{63F0E7D4-3D13-45ED-B887-A5D09D417F08}"/>
-              </a:ext>
-            </a:extLst>
-          </p:cNvPr>
+          <p:cNvPr id="5" name="Slide Number Placeholder 4"/>
           <p:cNvSpPr>
             <a:spLocks noGrp="1"/>
           </p:cNvSpPr>
@@ -6299,10 +6112,6 @@
             </a:pPr>
             <a:fld id="{5BC7FEBF-A170-470C-A369-F0D066FB58E5}" type="slidenum">
               <a:rPr lang="en-US" smtClean="0"/>
-              <a:pPr>
-                <a:defRPr/>
-              </a:pPr>
-              <a:t>2</a:t>
             </a:fld>
             <a:endParaRPr lang="en-US"/>
           </a:p>
@@ -6365,13 +6174,7 @@
       </p:sp>
       <p:sp>
         <p:nvSpPr>
-          <p:cNvPr id="9" name="Content Placeholder 8">
-            <a:extLst>
-              <a:ext uri="{FF2B5EF4-FFF2-40B4-BE49-F238E27FC236}">
-                <a16:creationId xmlns:a16="http://schemas.microsoft.com/office/drawing/2014/main" id="{63CC1524-67B1-475E-8C8C-8A223B7A4300}"/>
-              </a:ext>
-            </a:extLst>
-          </p:cNvPr>
+          <p:cNvPr id="9" name="Content Placeholder 8"/>
           <p:cNvSpPr>
             <a:spLocks noGrp="1"/>
           </p:cNvSpPr>
@@ -6396,7 +6199,7 @@
             </a:pPr>
             <a:r>
               <a:rPr lang="fr-FR" sz="3000" dirty="0">
-                <a:hlinkClick r:id="rId2" action="ppaction://hlinkfile"/>
+                <a:hlinkClick r:id="rId1" action="ppaction://hlinkfile"/>
               </a:rPr>
               <a:t>UDP_Server_Code.py</a:t>
             </a:r>
@@ -6406,16 +6209,8 @@
       </p:sp>
       <p:sp>
         <p:nvSpPr>
-          <p:cNvPr id="10" name="Content Placeholder 8">
-            <a:extLst>
-              <a:ext uri="{FF2B5EF4-FFF2-40B4-BE49-F238E27FC236}">
-                <a16:creationId xmlns:a16="http://schemas.microsoft.com/office/drawing/2014/main" id="{4A8291F0-D632-41D9-84A1-0CD23016CE31}"/>
-              </a:ext>
-            </a:extLst>
-          </p:cNvPr>
-          <p:cNvSpPr txBox="1">
-            <a:spLocks/>
-          </p:cNvSpPr>
+          <p:cNvPr id="10" name="Content Placeholder 8"/>
+          <p:cNvSpPr txBox="1"/>
           <p:nvPr/>
         </p:nvSpPr>
         <p:spPr>
@@ -6436,7 +6231,7 @@
               <a:spcBef>
                 <a:spcPct val="20000"/>
               </a:spcBef>
-              <a:buFont typeface="Arial"/>
+              <a:buFont typeface="Arial" panose="020B0604020202020204"/>
               <a:buChar char="•"/>
               <a:defRPr sz="3200" kern="1200">
                 <a:solidFill>
@@ -6451,7 +6246,7 @@
               <a:spcBef>
                 <a:spcPct val="20000"/>
               </a:spcBef>
-              <a:buFont typeface="Arial"/>
+              <a:buFont typeface="Arial" panose="020B0604020202020204"/>
               <a:buChar char="–"/>
               <a:defRPr sz="2800" kern="1200">
                 <a:solidFill>
@@ -6466,7 +6261,7 @@
               <a:spcBef>
                 <a:spcPct val="20000"/>
               </a:spcBef>
-              <a:buFont typeface="Arial"/>
+              <a:buFont typeface="Arial" panose="020B0604020202020204"/>
               <a:buChar char="•"/>
               <a:defRPr sz="2400" kern="1200">
                 <a:solidFill>
@@ -6481,7 +6276,7 @@
               <a:spcBef>
                 <a:spcPct val="20000"/>
               </a:spcBef>
-              <a:buFont typeface="Arial"/>
+              <a:buFont typeface="Arial" panose="020B0604020202020204"/>
               <a:buChar char="–"/>
               <a:defRPr sz="2000" kern="1200">
                 <a:solidFill>
@@ -6496,7 +6291,7 @@
               <a:spcBef>
                 <a:spcPct val="20000"/>
               </a:spcBef>
-              <a:buFont typeface="Arial"/>
+              <a:buFont typeface="Arial" panose="020B0604020202020204"/>
               <a:buChar char="»"/>
               <a:defRPr sz="2000" kern="1200">
                 <a:solidFill>
@@ -6511,7 +6306,7 @@
               <a:spcBef>
                 <a:spcPct val="20000"/>
               </a:spcBef>
-              <a:buFont typeface="Arial"/>
+              <a:buFont typeface="Arial" panose="020B0604020202020204"/>
               <a:buChar char="•"/>
               <a:defRPr sz="2000" kern="1200">
                 <a:solidFill>
@@ -6526,7 +6321,7 @@
               <a:spcBef>
                 <a:spcPct val="20000"/>
               </a:spcBef>
-              <a:buFont typeface="Arial"/>
+              <a:buFont typeface="Arial" panose="020B0604020202020204"/>
               <a:buChar char="•"/>
               <a:defRPr sz="2000" kern="1200">
                 <a:solidFill>
@@ -6541,7 +6336,7 @@
               <a:spcBef>
                 <a:spcPct val="20000"/>
               </a:spcBef>
-              <a:buFont typeface="Arial"/>
+              <a:buFont typeface="Arial" panose="020B0604020202020204"/>
               <a:buChar char="•"/>
               <a:defRPr sz="2000" kern="1200">
                 <a:solidFill>
@@ -6556,7 +6351,7 @@
               <a:spcBef>
                 <a:spcPct val="20000"/>
               </a:spcBef>
-              <a:buFont typeface="Arial"/>
+              <a:buFont typeface="Arial" panose="020B0604020202020204"/>
               <a:buChar char="•"/>
               <a:defRPr sz="2000" kern="1200">
                 <a:solidFill>
@@ -6570,12 +6365,12 @@
           </a:lstStyle>
           <a:p>
             <a:pPr marL="0" indent="0">
-              <a:buFont typeface="Arial"/>
+              <a:buFont typeface="Arial" panose="020B0604020202020204"/>
               <a:buNone/>
             </a:pPr>
             <a:r>
               <a:rPr lang="fr-FR" dirty="0">
-                <a:hlinkClick r:id="rId3" action="ppaction://hlinkfile"/>
+                <a:hlinkClick r:id="rId2" action="ppaction://hlinkfile"/>
               </a:rPr>
               <a:t>UDP_Client_Code.py</a:t>
             </a:r>
@@ -6584,11 +6379,6 @@
         </p:txBody>
       </p:sp>
     </p:spTree>
-    <p:extLst>
-      <p:ext uri="{BB962C8B-B14F-4D97-AF65-F5344CB8AC3E}">
-        <p14:creationId xmlns:p14="http://schemas.microsoft.com/office/powerpoint/2010/main" val="2375125278"/>
-      </p:ext>
-    </p:extLst>
   </p:cSld>
   <p:clrMapOvr>
     <a:masterClrMapping/>
@@ -6615,13 +6405,7 @@
       </p:grpSpPr>
       <p:sp>
         <p:nvSpPr>
-          <p:cNvPr id="2" name="Title 1">
-            <a:extLst>
-              <a:ext uri="{FF2B5EF4-FFF2-40B4-BE49-F238E27FC236}">
-                <a16:creationId xmlns:a16="http://schemas.microsoft.com/office/drawing/2014/main" id="{063ECE1A-AC23-707A-B266-A76EA211A1C0}"/>
-              </a:ext>
-            </a:extLst>
-          </p:cNvPr>
+          <p:cNvPr id="2" name="Title 1"/>
           <p:cNvSpPr>
             <a:spLocks noGrp="1"/>
           </p:cNvSpPr>
@@ -6638,28 +6422,18 @@
               <a:rPr lang="en-US" dirty="0"/>
               <a:t>Transport Layer Protocols</a:t>
             </a:r>
+            <a:endParaRPr lang="en-US" dirty="0"/>
           </a:p>
         </p:txBody>
       </p:sp>
       <p:graphicFrame>
         <p:nvGraphicFramePr>
-          <p:cNvPr id="4" name="Table 4">
-            <a:extLst>
-              <a:ext uri="{FF2B5EF4-FFF2-40B4-BE49-F238E27FC236}">
-                <a16:creationId xmlns:a16="http://schemas.microsoft.com/office/drawing/2014/main" id="{A3C94F63-CD26-7566-AE76-7E4947FC7722}"/>
-              </a:ext>
-            </a:extLst>
-          </p:cNvPr>
+          <p:cNvPr id="4" name="Table 4"/>
           <p:cNvGraphicFramePr>
             <a:graphicFrameLocks noGrp="1"/>
           </p:cNvGraphicFramePr>
           <p:nvPr>
             <p:ph idx="1"/>
-            <p:extLst>
-              <p:ext uri="{D42A27DB-BD31-4B8C-83A1-F6EECF244321}">
-                <p14:modId xmlns:p14="http://schemas.microsoft.com/office/powerpoint/2010/main" val="4035974287"/>
-              </p:ext>
-            </p:extLst>
           </p:nvPr>
         </p:nvGraphicFramePr>
         <p:xfrm>
@@ -6673,27 +6447,9 @@
                 <a:tableStyleId>{5940675A-B579-460E-94D1-54222C63F5DA}</a:tableStyleId>
               </a:tblPr>
               <a:tblGrid>
-                <a:gridCol w="3850878">
-                  <a:extLst>
-                    <a:ext uri="{9D8B030D-6E8A-4147-A177-3AD203B41FA5}">
-                      <a16:colId xmlns:a16="http://schemas.microsoft.com/office/drawing/2014/main" val="556748227"/>
-                    </a:ext>
-                  </a:extLst>
-                </a:gridCol>
-                <a:gridCol w="2021285">
-                  <a:extLst>
-                    <a:ext uri="{9D8B030D-6E8A-4147-A177-3AD203B41FA5}">
-                      <a16:colId xmlns:a16="http://schemas.microsoft.com/office/drawing/2014/main" val="2013975809"/>
-                    </a:ext>
-                  </a:extLst>
-                </a:gridCol>
-                <a:gridCol w="2152656">
-                  <a:extLst>
-                    <a:ext uri="{9D8B030D-6E8A-4147-A177-3AD203B41FA5}">
-                      <a16:colId xmlns:a16="http://schemas.microsoft.com/office/drawing/2014/main" val="3244960863"/>
-                    </a:ext>
-                  </a:extLst>
-                </a:gridCol>
+                <a:gridCol w="3850878"/>
+                <a:gridCol w="2021285"/>
+                <a:gridCol w="2152656"/>
               </a:tblGrid>
               <a:tr h="535917">
                 <a:tc>
@@ -6705,6 +6461,7 @@
                         <a:rPr lang="en-US" sz="3200" dirty="0"/>
                         <a:t>Properties</a:t>
                       </a:r>
+                      <a:endParaRPr lang="en-US" sz="3200" dirty="0"/>
                     </a:p>
                   </a:txBody>
                   <a:tcPr marL="68580" marR="68580" marT="34290" marB="34290"/>
@@ -6719,6 +6476,7 @@
                         <a:rPr lang="en-US" sz="3200" dirty="0"/>
                         <a:t>TCP</a:t>
                       </a:r>
+                      <a:endParaRPr lang="en-US" sz="3200" dirty="0"/>
                     </a:p>
                   </a:txBody>
                   <a:tcPr marL="68580" marR="68580" marT="34290" marB="34290"/>
@@ -6733,15 +6491,11 @@
                         <a:rPr lang="en-US" sz="3200" dirty="0"/>
                         <a:t>UDP</a:t>
                       </a:r>
+                      <a:endParaRPr lang="en-US" sz="3200" dirty="0"/>
                     </a:p>
                   </a:txBody>
                   <a:tcPr marL="68580" marR="68580" marT="34290" marB="34290"/>
                 </a:tc>
-                <a:extLst>
-                  <a:ext uri="{0D108BD9-81ED-4DB2-BD59-A6C34878D82A}">
-                    <a16:rowId xmlns:a16="http://schemas.microsoft.com/office/drawing/2014/main" val="3551603118"/>
-                  </a:ext>
-                </a:extLst>
               </a:tr>
               <a:tr h="535917">
                 <a:tc>
@@ -6753,6 +6507,7 @@
                         <a:rPr lang="en-US" sz="3200" dirty="0"/>
                         <a:t>Connections</a:t>
                       </a:r>
+                      <a:endParaRPr lang="en-US" sz="3200" dirty="0"/>
                     </a:p>
                   </a:txBody>
                   <a:tcPr marL="68580" marR="68580" marT="34290" marB="34290"/>
@@ -6787,11 +6542,6 @@
                   </a:txBody>
                   <a:tcPr marL="68580" marR="68580" marT="34290" marB="34290"/>
                 </a:tc>
-                <a:extLst>
-                  <a:ext uri="{0D108BD9-81ED-4DB2-BD59-A6C34878D82A}">
-                    <a16:rowId xmlns:a16="http://schemas.microsoft.com/office/drawing/2014/main" val="1037399492"/>
-                  </a:ext>
-                </a:extLst>
               </a:tr>
               <a:tr h="535917">
                 <a:tc>
@@ -6803,6 +6553,7 @@
                         <a:rPr lang="en-US" sz="3200" dirty="0"/>
                         <a:t>Reliability &amp; Ordering</a:t>
                       </a:r>
+                      <a:endParaRPr lang="en-US" sz="3200" dirty="0"/>
                     </a:p>
                   </a:txBody>
                   <a:tcPr marL="68580" marR="68580" marT="34290" marB="34290"/>
@@ -6826,7 +6577,6 @@
                         <a:buSzTx/>
                         <a:buFontTx/>
                         <a:buNone/>
-                        <a:tabLst/>
                         <a:defRPr/>
                       </a:pPr>
                       <a:endParaRPr lang="en-US" sz="3200" b="1" dirty="0">
@@ -6853,11 +6603,6 @@
                   </a:txBody>
                   <a:tcPr marL="68580" marR="68580" marT="34290" marB="34290"/>
                 </a:tc>
-                <a:extLst>
-                  <a:ext uri="{0D108BD9-81ED-4DB2-BD59-A6C34878D82A}">
-                    <a16:rowId xmlns:a16="http://schemas.microsoft.com/office/drawing/2014/main" val="2743064322"/>
-                  </a:ext>
-                </a:extLst>
               </a:tr>
               <a:tr h="535917">
                 <a:tc>
@@ -6869,6 +6614,7 @@
                         <a:rPr lang="en-US" sz="3200" dirty="0"/>
                         <a:t>ACK </a:t>
                       </a:r>
+                      <a:endParaRPr lang="en-US" sz="3200" dirty="0"/>
                     </a:p>
                   </a:txBody>
                   <a:tcPr marL="68580" marR="68580" marT="34290" marB="34290"/>
@@ -6892,7 +6638,6 @@
                         <a:buSzTx/>
                         <a:buFontTx/>
                         <a:buNone/>
-                        <a:tabLst/>
                         <a:defRPr/>
                       </a:pPr>
                       <a:endParaRPr lang="en-US" sz="3200" b="1" dirty="0">
@@ -6919,11 +6664,6 @@
                   </a:txBody>
                   <a:tcPr marL="68580" marR="68580" marT="34290" marB="34290"/>
                 </a:tc>
-                <a:extLst>
-                  <a:ext uri="{0D108BD9-81ED-4DB2-BD59-A6C34878D82A}">
-                    <a16:rowId xmlns:a16="http://schemas.microsoft.com/office/drawing/2014/main" val="2744239083"/>
-                  </a:ext>
-                </a:extLst>
               </a:tr>
               <a:tr h="535917">
                 <a:tc>
@@ -6935,6 +6675,7 @@
                         <a:rPr lang="en-US" sz="3200" dirty="0"/>
                         <a:t>Speed</a:t>
                       </a:r>
+                      <a:endParaRPr lang="en-US" sz="3200" dirty="0"/>
                     </a:p>
                   </a:txBody>
                   <a:tcPr marL="68580" marR="68580" marT="34290" marB="34290"/>
@@ -6973,7 +6714,6 @@
                         <a:buSzTx/>
                         <a:buFontTx/>
                         <a:buNone/>
-                        <a:tabLst/>
                         <a:defRPr/>
                       </a:pPr>
                       <a:endParaRPr lang="en-US" sz="3200" b="1" dirty="0">
@@ -6985,11 +6725,6 @@
                   </a:txBody>
                   <a:tcPr marL="68580" marR="68580" marT="34290" marB="34290"/>
                 </a:tc>
-                <a:extLst>
-                  <a:ext uri="{0D108BD9-81ED-4DB2-BD59-A6C34878D82A}">
-                    <a16:rowId xmlns:a16="http://schemas.microsoft.com/office/drawing/2014/main" val="1655004078"/>
-                  </a:ext>
-                </a:extLst>
               </a:tr>
               <a:tr h="535917">
                 <a:tc>
@@ -7001,6 +6736,7 @@
                         <a:rPr lang="en-US" sz="3200" dirty="0"/>
                         <a:t>Broadcast</a:t>
                       </a:r>
+                      <a:endParaRPr lang="en-US" sz="3200" dirty="0"/>
                     </a:p>
                   </a:txBody>
                   <a:tcPr marL="68580" marR="68580" marT="34290" marB="34290"/>
@@ -7039,7 +6775,6 @@
                         <a:buSzTx/>
                         <a:buFontTx/>
                         <a:buNone/>
-                        <a:tabLst/>
                         <a:defRPr/>
                       </a:pPr>
                       <a:endParaRPr lang="en-US" sz="3200" b="1" dirty="0">
@@ -7051,11 +6786,6 @@
                   </a:txBody>
                   <a:tcPr marL="68580" marR="68580" marT="34290" marB="34290"/>
                 </a:tc>
-                <a:extLst>
-                  <a:ext uri="{0D108BD9-81ED-4DB2-BD59-A6C34878D82A}">
-                    <a16:rowId xmlns:a16="http://schemas.microsoft.com/office/drawing/2014/main" val="350885391"/>
-                  </a:ext>
-                </a:extLst>
               </a:tr>
             </a:tbl>
           </a:graphicData>
@@ -7063,13 +6793,7 @@
       </p:graphicFrame>
       <p:sp>
         <p:nvSpPr>
-          <p:cNvPr id="3" name="Rectangle 2">
-            <a:extLst>
-              <a:ext uri="{FF2B5EF4-FFF2-40B4-BE49-F238E27FC236}">
-                <a16:creationId xmlns:a16="http://schemas.microsoft.com/office/drawing/2014/main" id="{DB071002-9DB6-41FB-880E-84FFE8CBC6E7}"/>
-              </a:ext>
-            </a:extLst>
-          </p:cNvPr>
+          <p:cNvPr id="3" name="Rectangle 2"/>
           <p:cNvSpPr/>
           <p:nvPr/>
         </p:nvSpPr>
@@ -7113,18 +6837,17 @@
               </a:rPr>
               <a:t>√</a:t>
             </a:r>
-          </a:p>
-        </p:txBody>
-      </p:sp>
-      <p:sp>
-        <p:nvSpPr>
-          <p:cNvPr id="5" name="Rectangle 4">
-            <a:extLst>
-              <a:ext uri="{FF2B5EF4-FFF2-40B4-BE49-F238E27FC236}">
-                <a16:creationId xmlns:a16="http://schemas.microsoft.com/office/drawing/2014/main" id="{4E5A430C-5E88-48D2-A9B7-33E72DFB938A}"/>
-              </a:ext>
-            </a:extLst>
-          </p:cNvPr>
+            <a:endParaRPr lang="en-US" sz="3600" b="1" dirty="0">
+              <a:solidFill>
+                <a:srgbClr val="7030A0"/>
+              </a:solidFill>
+            </a:endParaRPr>
+          </a:p>
+        </p:txBody>
+      </p:sp>
+      <p:sp>
+        <p:nvSpPr>
+          <p:cNvPr id="5" name="Rectangle 4"/>
           <p:cNvSpPr/>
           <p:nvPr/>
         </p:nvSpPr>
@@ -7168,18 +6891,17 @@
               </a:rPr>
               <a:t>√</a:t>
             </a:r>
-          </a:p>
-        </p:txBody>
-      </p:sp>
-      <p:sp>
-        <p:nvSpPr>
-          <p:cNvPr id="6" name="Rectangle 5">
-            <a:extLst>
-              <a:ext uri="{FF2B5EF4-FFF2-40B4-BE49-F238E27FC236}">
-                <a16:creationId xmlns:a16="http://schemas.microsoft.com/office/drawing/2014/main" id="{FDFD0249-B261-40D4-B43C-6F7E9D02EADF}"/>
-              </a:ext>
-            </a:extLst>
-          </p:cNvPr>
+            <a:endParaRPr lang="en-US" sz="3600" b="1" dirty="0">
+              <a:solidFill>
+                <a:srgbClr val="7030A0"/>
+              </a:solidFill>
+            </a:endParaRPr>
+          </a:p>
+        </p:txBody>
+      </p:sp>
+      <p:sp>
+        <p:nvSpPr>
+          <p:cNvPr id="6" name="Rectangle 5"/>
           <p:cNvSpPr/>
           <p:nvPr/>
         </p:nvSpPr>
@@ -7223,18 +6945,17 @@
               </a:rPr>
               <a:t>√</a:t>
             </a:r>
-          </a:p>
-        </p:txBody>
-      </p:sp>
-      <p:sp>
-        <p:nvSpPr>
-          <p:cNvPr id="7" name="Rectangle 6">
-            <a:extLst>
-              <a:ext uri="{FF2B5EF4-FFF2-40B4-BE49-F238E27FC236}">
-                <a16:creationId xmlns:a16="http://schemas.microsoft.com/office/drawing/2014/main" id="{F69E513C-0FBF-4087-9DBC-B11592029F34}"/>
-              </a:ext>
-            </a:extLst>
-          </p:cNvPr>
+            <a:endParaRPr lang="en-US" sz="3600" b="1" dirty="0">
+              <a:solidFill>
+                <a:srgbClr val="7030A0"/>
+              </a:solidFill>
+            </a:endParaRPr>
+          </a:p>
+        </p:txBody>
+      </p:sp>
+      <p:sp>
+        <p:nvSpPr>
+          <p:cNvPr id="7" name="Rectangle 6"/>
           <p:cNvSpPr/>
           <p:nvPr/>
         </p:nvSpPr>
@@ -7278,18 +6999,17 @@
               </a:rPr>
               <a:t>√</a:t>
             </a:r>
-          </a:p>
-        </p:txBody>
-      </p:sp>
-      <p:sp>
-        <p:nvSpPr>
-          <p:cNvPr id="8" name="Rectangle 7">
-            <a:extLst>
-              <a:ext uri="{FF2B5EF4-FFF2-40B4-BE49-F238E27FC236}">
-                <a16:creationId xmlns:a16="http://schemas.microsoft.com/office/drawing/2014/main" id="{7BF70378-A071-406C-8FE7-DAE0492995E1}"/>
-              </a:ext>
-            </a:extLst>
-          </p:cNvPr>
+            <a:endParaRPr lang="en-US" sz="3600" b="1" dirty="0">
+              <a:solidFill>
+                <a:srgbClr val="7030A0"/>
+              </a:solidFill>
+            </a:endParaRPr>
+          </a:p>
+        </p:txBody>
+      </p:sp>
+      <p:sp>
+        <p:nvSpPr>
+          <p:cNvPr id="8" name="Rectangle 7"/>
           <p:cNvSpPr/>
           <p:nvPr/>
         </p:nvSpPr>
@@ -7333,15 +7053,15 @@
               </a:rPr>
               <a:t>√</a:t>
             </a:r>
+            <a:endParaRPr lang="en-US" sz="3600" b="1" dirty="0">
+              <a:solidFill>
+                <a:srgbClr val="7030A0"/>
+              </a:solidFill>
+            </a:endParaRPr>
           </a:p>
         </p:txBody>
       </p:sp>
     </p:spTree>
-    <p:extLst>
-      <p:ext uri="{BB962C8B-B14F-4D97-AF65-F5344CB8AC3E}">
-        <p14:creationId xmlns:p14="http://schemas.microsoft.com/office/powerpoint/2010/main" val="667509614"/>
-      </p:ext>
-    </p:extLst>
   </p:cSld>
   <p:clrMapOvr>
     <a:masterClrMapping/>
@@ -7670,13 +7390,7 @@
       </p:grpSpPr>
       <p:sp>
         <p:nvSpPr>
-          <p:cNvPr id="2" name="Title 1">
-            <a:extLst>
-              <a:ext uri="{FF2B5EF4-FFF2-40B4-BE49-F238E27FC236}">
-                <a16:creationId xmlns:a16="http://schemas.microsoft.com/office/drawing/2014/main" id="{063ECE1A-AC23-707A-B266-A76EA211A1C0}"/>
-              </a:ext>
-            </a:extLst>
-          </p:cNvPr>
+          <p:cNvPr id="2" name="Title 1"/>
           <p:cNvSpPr>
             <a:spLocks noGrp="1"/>
           </p:cNvSpPr>
@@ -7695,28 +7409,18 @@
               <a:rPr lang="en-US" dirty="0"/>
               <a:t>Transport Layer Protocols Use Cases</a:t>
             </a:r>
+            <a:endParaRPr lang="en-US" dirty="0"/>
           </a:p>
         </p:txBody>
       </p:sp>
       <p:graphicFrame>
         <p:nvGraphicFramePr>
-          <p:cNvPr id="19" name="Content Placeholder 18">
-            <a:extLst>
-              <a:ext uri="{FF2B5EF4-FFF2-40B4-BE49-F238E27FC236}">
-                <a16:creationId xmlns:a16="http://schemas.microsoft.com/office/drawing/2014/main" id="{3E344C37-390A-41B7-8E0A-CFAE256D496E}"/>
-              </a:ext>
-            </a:extLst>
-          </p:cNvPr>
+          <p:cNvPr id="19" name="Content Placeholder 18"/>
           <p:cNvGraphicFramePr>
             <a:graphicFrameLocks noGrp="1"/>
           </p:cNvGraphicFramePr>
           <p:nvPr>
             <p:ph idx="1"/>
-            <p:extLst>
-              <p:ext uri="{D42A27DB-BD31-4B8C-83A1-F6EECF244321}">
-                <p14:modId xmlns:p14="http://schemas.microsoft.com/office/powerpoint/2010/main" val="98672452"/>
-              </p:ext>
-            </p:extLst>
           </p:nvPr>
         </p:nvGraphicFramePr>
         <p:xfrm>
@@ -7730,27 +7434,9 @@
                 <a:tableStyleId>{616DA210-FB5B-4158-B5E0-FEB733F419BA}</a:tableStyleId>
               </a:tblPr>
               <a:tblGrid>
-                <a:gridCol w="5750851">
-                  <a:extLst>
-                    <a:ext uri="{9D8B030D-6E8A-4147-A177-3AD203B41FA5}">
-                      <a16:colId xmlns:a16="http://schemas.microsoft.com/office/drawing/2014/main" val="2764512424"/>
-                    </a:ext>
-                  </a:extLst>
-                </a:gridCol>
-                <a:gridCol w="1482262">
-                  <a:extLst>
-                    <a:ext uri="{9D8B030D-6E8A-4147-A177-3AD203B41FA5}">
-                      <a16:colId xmlns:a16="http://schemas.microsoft.com/office/drawing/2014/main" val="1970279232"/>
-                    </a:ext>
-                  </a:extLst>
-                </a:gridCol>
-                <a:gridCol w="1482262">
-                  <a:extLst>
-                    <a:ext uri="{9D8B030D-6E8A-4147-A177-3AD203B41FA5}">
-                      <a16:colId xmlns:a16="http://schemas.microsoft.com/office/drawing/2014/main" val="101783852"/>
-                    </a:ext>
-                  </a:extLst>
-                </a:gridCol>
+                <a:gridCol w="5750851"/>
+                <a:gridCol w="1482262"/>
+                <a:gridCol w="1482262"/>
               </a:tblGrid>
               <a:tr h="463585">
                 <a:tc>
@@ -7822,11 +7508,6 @@
                   </a:txBody>
                   <a:tcPr marL="2018" marR="2018" marT="2018" marB="0" anchor="ctr"/>
                 </a:tc>
-                <a:extLst>
-                  <a:ext uri="{0D108BD9-81ED-4DB2-BD59-A6C34878D82A}">
-                    <a16:rowId xmlns:a16="http://schemas.microsoft.com/office/drawing/2014/main" val="2317885492"/>
-                  </a:ext>
-                </a:extLst>
               </a:tr>
               <a:tr h="461253">
                 <a:tc>
@@ -7898,11 +7579,6 @@
                   </a:txBody>
                   <a:tcPr marL="2018" marR="2018" marT="2018" marB="0" anchor="ctr"/>
                 </a:tc>
-                <a:extLst>
-                  <a:ext uri="{0D108BD9-81ED-4DB2-BD59-A6C34878D82A}">
-                    <a16:rowId xmlns:a16="http://schemas.microsoft.com/office/drawing/2014/main" val="2267082549"/>
-                  </a:ext>
-                </a:extLst>
               </a:tr>
               <a:tr h="461253">
                 <a:tc>
@@ -7962,11 +7638,6 @@
                   </a:txBody>
                   <a:tcPr marL="2018" marR="2018" marT="2018" marB="0" anchor="ctr"/>
                 </a:tc>
-                <a:extLst>
-                  <a:ext uri="{0D108BD9-81ED-4DB2-BD59-A6C34878D82A}">
-                    <a16:rowId xmlns:a16="http://schemas.microsoft.com/office/drawing/2014/main" val="2979067105"/>
-                  </a:ext>
-                </a:extLst>
               </a:tr>
               <a:tr h="461253">
                 <a:tc>
@@ -8026,11 +7697,6 @@
                   </a:txBody>
                   <a:tcPr marL="2018" marR="2018" marT="2018" marB="0" anchor="ctr"/>
                 </a:tc>
-                <a:extLst>
-                  <a:ext uri="{0D108BD9-81ED-4DB2-BD59-A6C34878D82A}">
-                    <a16:rowId xmlns:a16="http://schemas.microsoft.com/office/drawing/2014/main" val="2510290171"/>
-                  </a:ext>
-                </a:extLst>
               </a:tr>
               <a:tr h="461253">
                 <a:tc>
@@ -8090,11 +7756,6 @@
                   </a:txBody>
                   <a:tcPr marL="2018" marR="2018" marT="2018" marB="0" anchor="ctr"/>
                 </a:tc>
-                <a:extLst>
-                  <a:ext uri="{0D108BD9-81ED-4DB2-BD59-A6C34878D82A}">
-                    <a16:rowId xmlns:a16="http://schemas.microsoft.com/office/drawing/2014/main" val="1443771177"/>
-                  </a:ext>
-                </a:extLst>
               </a:tr>
               <a:tr h="461253">
                 <a:tc>
@@ -8154,11 +7815,6 @@
                   </a:txBody>
                   <a:tcPr marL="2018" marR="2018" marT="2018" marB="0" anchor="ctr"/>
                 </a:tc>
-                <a:extLst>
-                  <a:ext uri="{0D108BD9-81ED-4DB2-BD59-A6C34878D82A}">
-                    <a16:rowId xmlns:a16="http://schemas.microsoft.com/office/drawing/2014/main" val="376192543"/>
-                  </a:ext>
-                </a:extLst>
               </a:tr>
               <a:tr h="461253">
                 <a:tc>
@@ -8230,11 +7886,6 @@
                   </a:txBody>
                   <a:tcPr marL="2018" marR="2018" marT="2018" marB="0" anchor="ctr"/>
                 </a:tc>
-                <a:extLst>
-                  <a:ext uri="{0D108BD9-81ED-4DB2-BD59-A6C34878D82A}">
-                    <a16:rowId xmlns:a16="http://schemas.microsoft.com/office/drawing/2014/main" val="3938093618"/>
-                  </a:ext>
-                </a:extLst>
               </a:tr>
               <a:tr h="461253">
                 <a:tc>
@@ -8294,11 +7945,6 @@
                   </a:txBody>
                   <a:tcPr marL="2018" marR="2018" marT="2018" marB="0" anchor="ctr"/>
                 </a:tc>
-                <a:extLst>
-                  <a:ext uri="{0D108BD9-81ED-4DB2-BD59-A6C34878D82A}">
-                    <a16:rowId xmlns:a16="http://schemas.microsoft.com/office/drawing/2014/main" val="4067217506"/>
-                  </a:ext>
-                </a:extLst>
               </a:tr>
               <a:tr h="461253">
                 <a:tc>
@@ -8370,11 +8016,6 @@
                   </a:txBody>
                   <a:tcPr marL="2018" marR="2018" marT="2018" marB="0" anchor="b"/>
                 </a:tc>
-                <a:extLst>
-                  <a:ext uri="{0D108BD9-81ED-4DB2-BD59-A6C34878D82A}">
-                    <a16:rowId xmlns:a16="http://schemas.microsoft.com/office/drawing/2014/main" val="1100416363"/>
-                  </a:ext>
-                </a:extLst>
               </a:tr>
               <a:tr h="461253">
                 <a:tc>
@@ -8434,11 +8075,6 @@
                   </a:txBody>
                   <a:tcPr marL="2018" marR="2018" marT="2018" marB="0" anchor="b"/>
                 </a:tc>
-                <a:extLst>
-                  <a:ext uri="{0D108BD9-81ED-4DB2-BD59-A6C34878D82A}">
-                    <a16:rowId xmlns:a16="http://schemas.microsoft.com/office/drawing/2014/main" val="1461200157"/>
-                  </a:ext>
-                </a:extLst>
               </a:tr>
             </a:tbl>
           </a:graphicData>
@@ -8446,13 +8082,7 @@
       </p:graphicFrame>
       <p:sp>
         <p:nvSpPr>
-          <p:cNvPr id="20" name="Rectangle 19">
-            <a:extLst>
-              <a:ext uri="{FF2B5EF4-FFF2-40B4-BE49-F238E27FC236}">
-                <a16:creationId xmlns:a16="http://schemas.microsoft.com/office/drawing/2014/main" id="{6890198C-C4DF-42BE-80FD-F46F0374A197}"/>
-              </a:ext>
-            </a:extLst>
-          </p:cNvPr>
+          <p:cNvPr id="20" name="Rectangle 19"/>
           <p:cNvSpPr/>
           <p:nvPr/>
         </p:nvSpPr>
@@ -8496,18 +8126,17 @@
               </a:rPr>
               <a:t>√</a:t>
             </a:r>
-          </a:p>
-        </p:txBody>
-      </p:sp>
-      <p:sp>
-        <p:nvSpPr>
-          <p:cNvPr id="21" name="Rectangle 20">
-            <a:extLst>
-              <a:ext uri="{FF2B5EF4-FFF2-40B4-BE49-F238E27FC236}">
-                <a16:creationId xmlns:a16="http://schemas.microsoft.com/office/drawing/2014/main" id="{C8BFD129-5998-49AF-AE46-C8798CBFFF40}"/>
-              </a:ext>
-            </a:extLst>
-          </p:cNvPr>
+            <a:endParaRPr lang="en-US" sz="3600" b="1" dirty="0">
+              <a:solidFill>
+                <a:srgbClr val="7030A0"/>
+              </a:solidFill>
+            </a:endParaRPr>
+          </a:p>
+        </p:txBody>
+      </p:sp>
+      <p:sp>
+        <p:nvSpPr>
+          <p:cNvPr id="21" name="Rectangle 20"/>
           <p:cNvSpPr/>
           <p:nvPr/>
         </p:nvSpPr>
@@ -8551,18 +8180,17 @@
               </a:rPr>
               <a:t>√</a:t>
             </a:r>
-          </a:p>
-        </p:txBody>
-      </p:sp>
-      <p:sp>
-        <p:nvSpPr>
-          <p:cNvPr id="22" name="Rectangle 21">
-            <a:extLst>
-              <a:ext uri="{FF2B5EF4-FFF2-40B4-BE49-F238E27FC236}">
-                <a16:creationId xmlns:a16="http://schemas.microsoft.com/office/drawing/2014/main" id="{1FFE60AA-6CB0-4E31-A804-7018BCAADE17}"/>
-              </a:ext>
-            </a:extLst>
-          </p:cNvPr>
+            <a:endParaRPr lang="en-US" sz="3600" b="1" dirty="0">
+              <a:solidFill>
+                <a:srgbClr val="7030A0"/>
+              </a:solidFill>
+            </a:endParaRPr>
+          </a:p>
+        </p:txBody>
+      </p:sp>
+      <p:sp>
+        <p:nvSpPr>
+          <p:cNvPr id="22" name="Rectangle 21"/>
           <p:cNvSpPr/>
           <p:nvPr/>
         </p:nvSpPr>
@@ -8606,18 +8234,17 @@
               </a:rPr>
               <a:t>√</a:t>
             </a:r>
-          </a:p>
-        </p:txBody>
-      </p:sp>
-      <p:sp>
-        <p:nvSpPr>
-          <p:cNvPr id="23" name="Rectangle 22">
-            <a:extLst>
-              <a:ext uri="{FF2B5EF4-FFF2-40B4-BE49-F238E27FC236}">
-                <a16:creationId xmlns:a16="http://schemas.microsoft.com/office/drawing/2014/main" id="{58B4171D-B1D7-4BCF-A147-F9EC675FABFB}"/>
-              </a:ext>
-            </a:extLst>
-          </p:cNvPr>
+            <a:endParaRPr lang="en-US" sz="3600" b="1" dirty="0">
+              <a:solidFill>
+                <a:srgbClr val="7030A0"/>
+              </a:solidFill>
+            </a:endParaRPr>
+          </a:p>
+        </p:txBody>
+      </p:sp>
+      <p:sp>
+        <p:nvSpPr>
+          <p:cNvPr id="23" name="Rectangle 22"/>
           <p:cNvSpPr/>
           <p:nvPr/>
         </p:nvSpPr>
@@ -8661,18 +8288,17 @@
               </a:rPr>
               <a:t>√</a:t>
             </a:r>
-          </a:p>
-        </p:txBody>
-      </p:sp>
-      <p:sp>
-        <p:nvSpPr>
-          <p:cNvPr id="24" name="Rectangle 23">
-            <a:extLst>
-              <a:ext uri="{FF2B5EF4-FFF2-40B4-BE49-F238E27FC236}">
-                <a16:creationId xmlns:a16="http://schemas.microsoft.com/office/drawing/2014/main" id="{4DC277F5-928D-42A3-9C37-A7125948C0D8}"/>
-              </a:ext>
-            </a:extLst>
-          </p:cNvPr>
+            <a:endParaRPr lang="en-US" sz="3600" b="1" dirty="0">
+              <a:solidFill>
+                <a:srgbClr val="7030A0"/>
+              </a:solidFill>
+            </a:endParaRPr>
+          </a:p>
+        </p:txBody>
+      </p:sp>
+      <p:sp>
+        <p:nvSpPr>
+          <p:cNvPr id="24" name="Rectangle 23"/>
           <p:cNvSpPr/>
           <p:nvPr/>
         </p:nvSpPr>
@@ -8716,18 +8342,17 @@
               </a:rPr>
               <a:t>√</a:t>
             </a:r>
-          </a:p>
-        </p:txBody>
-      </p:sp>
-      <p:sp>
-        <p:nvSpPr>
-          <p:cNvPr id="25" name="Rectangle 24">
-            <a:extLst>
-              <a:ext uri="{FF2B5EF4-FFF2-40B4-BE49-F238E27FC236}">
-                <a16:creationId xmlns:a16="http://schemas.microsoft.com/office/drawing/2014/main" id="{46DD6775-D85F-44D8-A565-2F10B88545DA}"/>
-              </a:ext>
-            </a:extLst>
-          </p:cNvPr>
+            <a:endParaRPr lang="en-US" sz="3600" b="1" dirty="0">
+              <a:solidFill>
+                <a:srgbClr val="7030A0"/>
+              </a:solidFill>
+            </a:endParaRPr>
+          </a:p>
+        </p:txBody>
+      </p:sp>
+      <p:sp>
+        <p:nvSpPr>
+          <p:cNvPr id="25" name="Rectangle 24"/>
           <p:cNvSpPr/>
           <p:nvPr/>
         </p:nvSpPr>
@@ -8771,18 +8396,17 @@
               </a:rPr>
               <a:t>√</a:t>
             </a:r>
-          </a:p>
-        </p:txBody>
-      </p:sp>
-      <p:sp>
-        <p:nvSpPr>
-          <p:cNvPr id="26" name="Rectangle 25">
-            <a:extLst>
-              <a:ext uri="{FF2B5EF4-FFF2-40B4-BE49-F238E27FC236}">
-                <a16:creationId xmlns:a16="http://schemas.microsoft.com/office/drawing/2014/main" id="{9E599C50-556D-4BF3-943A-D2EFD9E2779B}"/>
-              </a:ext>
-            </a:extLst>
-          </p:cNvPr>
+            <a:endParaRPr lang="en-US" sz="3600" b="1" dirty="0">
+              <a:solidFill>
+                <a:srgbClr val="7030A0"/>
+              </a:solidFill>
+            </a:endParaRPr>
+          </a:p>
+        </p:txBody>
+      </p:sp>
+      <p:sp>
+        <p:nvSpPr>
+          <p:cNvPr id="26" name="Rectangle 25"/>
           <p:cNvSpPr/>
           <p:nvPr/>
         </p:nvSpPr>
@@ -8826,18 +8450,17 @@
               </a:rPr>
               <a:t>√</a:t>
             </a:r>
-          </a:p>
-        </p:txBody>
-      </p:sp>
-      <p:sp>
-        <p:nvSpPr>
-          <p:cNvPr id="27" name="Rectangle 26">
-            <a:extLst>
-              <a:ext uri="{FF2B5EF4-FFF2-40B4-BE49-F238E27FC236}">
-                <a16:creationId xmlns:a16="http://schemas.microsoft.com/office/drawing/2014/main" id="{FF04D29C-72EC-4838-ABD1-AA1D613E3B92}"/>
-              </a:ext>
-            </a:extLst>
-          </p:cNvPr>
+            <a:endParaRPr lang="en-US" sz="3600" b="1" dirty="0">
+              <a:solidFill>
+                <a:srgbClr val="7030A0"/>
+              </a:solidFill>
+            </a:endParaRPr>
+          </a:p>
+        </p:txBody>
+      </p:sp>
+      <p:sp>
+        <p:nvSpPr>
+          <p:cNvPr id="27" name="Rectangle 26"/>
           <p:cNvSpPr/>
           <p:nvPr/>
         </p:nvSpPr>
@@ -8881,18 +8504,17 @@
               </a:rPr>
               <a:t>√</a:t>
             </a:r>
-          </a:p>
-        </p:txBody>
-      </p:sp>
-      <p:sp>
-        <p:nvSpPr>
-          <p:cNvPr id="28" name="Rectangle 27">
-            <a:extLst>
-              <a:ext uri="{FF2B5EF4-FFF2-40B4-BE49-F238E27FC236}">
-                <a16:creationId xmlns:a16="http://schemas.microsoft.com/office/drawing/2014/main" id="{4F90F21B-0E59-4200-BA9C-2299BCC2A6CD}"/>
-              </a:ext>
-            </a:extLst>
-          </p:cNvPr>
+            <a:endParaRPr lang="en-US" sz="3600" b="1" dirty="0">
+              <a:solidFill>
+                <a:srgbClr val="7030A0"/>
+              </a:solidFill>
+            </a:endParaRPr>
+          </a:p>
+        </p:txBody>
+      </p:sp>
+      <p:sp>
+        <p:nvSpPr>
+          <p:cNvPr id="28" name="Rectangle 27"/>
           <p:cNvSpPr/>
           <p:nvPr/>
         </p:nvSpPr>
@@ -8936,15 +8558,15 @@
               </a:rPr>
               <a:t>√</a:t>
             </a:r>
+            <a:endParaRPr lang="en-US" sz="3600" b="1" dirty="0">
+              <a:solidFill>
+                <a:srgbClr val="7030A0"/>
+              </a:solidFill>
+            </a:endParaRPr>
           </a:p>
         </p:txBody>
       </p:sp>
     </p:spTree>
-    <p:extLst>
-      <p:ext uri="{BB962C8B-B14F-4D97-AF65-F5344CB8AC3E}">
-        <p14:creationId xmlns:p14="http://schemas.microsoft.com/office/powerpoint/2010/main" val="1189356543"/>
-      </p:ext>
-    </p:extLst>
   </p:cSld>
   <p:clrMapOvr>
     <a:masterClrMapping/>
@@ -9587,11 +9209,6 @@
         </p:txBody>
       </p:sp>
     </p:spTree>
-    <p:extLst>
-      <p:ext uri="{BB962C8B-B14F-4D97-AF65-F5344CB8AC3E}">
-        <p14:creationId xmlns:p14="http://schemas.microsoft.com/office/powerpoint/2010/main" val="1394239980"/>
-      </p:ext>
-    </p:extLst>
   </p:cSld>
   <p:clrMapOvr>
     <a:masterClrMapping/>
@@ -9648,13 +9265,7 @@
       </p:sp>
       <p:pic>
         <p:nvPicPr>
-          <p:cNvPr id="5" name="Content Placeholder 4">
-            <a:extLst>
-              <a:ext uri="{FF2B5EF4-FFF2-40B4-BE49-F238E27FC236}">
-                <a16:creationId xmlns:a16="http://schemas.microsoft.com/office/drawing/2014/main" id="{157BB9F5-9D7E-48FD-8521-29ADE8D8EA60}"/>
-              </a:ext>
-            </a:extLst>
-          </p:cNvPr>
+          <p:cNvPr id="5" name="Content Placeholder 4"/>
           <p:cNvPicPr>
             <a:picLocks noGrp="1" noChangeAspect="1"/>
           </p:cNvPicPr>
@@ -9663,7 +9274,7 @@
           </p:nvPr>
         </p:nvPicPr>
         <p:blipFill>
-          <a:blip r:embed="rId2"/>
+          <a:blip r:embed="rId1"/>
           <a:stretch>
             <a:fillRect/>
           </a:stretch>
@@ -9676,11 +9287,6 @@
         </p:spPr>
       </p:pic>
     </p:spTree>
-    <p:extLst>
-      <p:ext uri="{BB962C8B-B14F-4D97-AF65-F5344CB8AC3E}">
-        <p14:creationId xmlns:p14="http://schemas.microsoft.com/office/powerpoint/2010/main" val="1704175205"/>
-      </p:ext>
-    </p:extLst>
   </p:cSld>
   <p:clrMapOvr>
     <a:masterClrMapping/>
@@ -9760,6 +9366,7 @@
               <a:rPr lang="en-US" i="1" u="sng" dirty="0"/>
               <a:t>Stateless Protocol: </a:t>
             </a:r>
+            <a:endParaRPr lang="en-US" i="1" u="sng" dirty="0"/>
           </a:p>
           <a:p>
             <a:pPr marL="0" indent="0" algn="just">
@@ -9769,6 +9376,7 @@
               <a:rPr lang="en-US" dirty="0"/>
               <a:t>There is no built-in mechanism to limit or authenticate UDP packets, so the server processes each packet without verification.</a:t>
             </a:r>
+            <a:endParaRPr lang="en-US" dirty="0"/>
           </a:p>
           <a:p>
             <a:pPr marL="514350" indent="-514350" algn="just">
@@ -9783,6 +9391,7 @@
               <a:rPr lang="en-US" dirty="0"/>
               <a:t>The attack relies on sheer volume to overwhelm the target.</a:t>
             </a:r>
+            <a:endParaRPr lang="en-US" dirty="0"/>
           </a:p>
           <a:p>
             <a:pPr marL="514350" indent="-514350" algn="just">
@@ -10093,6 +9702,7 @@
               <a:rPr lang="en-US" i="1" u="sng" dirty="0"/>
               <a:t>1. CPU Usage: </a:t>
             </a:r>
+            <a:endParaRPr lang="en-US" i="1" u="sng" dirty="0"/>
           </a:p>
           <a:p>
             <a:pPr marL="400050" lvl="1" indent="0">
@@ -10102,6 +9712,7 @@
               <a:rPr lang="en-US" dirty="0"/>
               <a:t>The target system's CPU is consumed by the need to inspect and possibly respond to each packet.</a:t>
             </a:r>
+            <a:endParaRPr lang="en-US" dirty="0"/>
           </a:p>
           <a:p>
             <a:pPr marL="0" indent="0">
@@ -10111,6 +9722,7 @@
               <a:rPr lang="en-US" i="1" u="sng" dirty="0"/>
               <a:t>2. Network Congestion: </a:t>
             </a:r>
+            <a:endParaRPr lang="en-US" i="1" u="sng" dirty="0"/>
           </a:p>
           <a:p>
             <a:pPr marL="400050" lvl="1" indent="0">
@@ -10120,6 +9732,7 @@
               <a:rPr lang="en-US" dirty="0"/>
               <a:t>The network becomes saturated, preventing legitimate traffic.</a:t>
             </a:r>
+            <a:endParaRPr lang="en-US" dirty="0"/>
           </a:p>
           <a:p>
             <a:pPr marL="0" indent="0">
@@ -10129,6 +9742,7 @@
               <a:rPr lang="en-US" i="1" u="sng" dirty="0"/>
               <a:t>3. ICMP Response Overload: </a:t>
             </a:r>
+            <a:endParaRPr lang="en-US" i="1" u="sng" dirty="0"/>
           </a:p>
           <a:p>
             <a:pPr marL="400050" lvl="1" indent="0">
@@ -10420,6 +10034,7 @@
               <a:rPr dirty="0"/>
               <a:t>A Comprehensive Study of ICMP-based DoS Attacks</a:t>
             </a:r>
+            <a:endParaRPr dirty="0"/>
           </a:p>
         </p:txBody>
       </p:sp>
@@ -10472,6 +10087,7 @@
               <a:rPr dirty="0"/>
               <a:t>What is ICMP?</a:t>
             </a:r>
+            <a:endParaRPr dirty="0"/>
           </a:p>
         </p:txBody>
       </p:sp>
@@ -10504,12 +10120,14 @@
               <a:rPr sz="2400" i="1" u="sng" dirty="0"/>
               <a:t>Definition:</a:t>
             </a:r>
+            <a:endParaRPr sz="2400" i="1" u="sng" dirty="0"/>
           </a:p>
           <a:p>
             <a:r>
               <a:rPr sz="2400" dirty="0"/>
               <a:t>- ICMP (Internet Control Message Protocol) is a network layer protocol used for error reporting and diagnostic purposes (e.g., ping).</a:t>
             </a:r>
+            <a:endParaRPr sz="2400" dirty="0"/>
           </a:p>
           <a:p>
             <a:endParaRPr sz="2400" dirty="0"/>
@@ -10522,18 +10140,21 @@
               <a:rPr sz="2400" i="1" u="sng" dirty="0"/>
               <a:t>Characteristics:</a:t>
             </a:r>
+            <a:endParaRPr sz="2400" i="1" u="sng" dirty="0"/>
           </a:p>
           <a:p>
             <a:r>
               <a:rPr sz="2400" dirty="0"/>
               <a:t>- Part of the IP protocol suite.</a:t>
             </a:r>
+            <a:endParaRPr sz="2400" dirty="0"/>
           </a:p>
           <a:p>
             <a:r>
               <a:rPr sz="2400" dirty="0"/>
               <a:t>- Stateless: Does not maintain connection states like TCP.</a:t>
             </a:r>
+            <a:endParaRPr sz="2400" dirty="0"/>
           </a:p>
           <a:p>
             <a:endParaRPr sz="2400" dirty="0"/>
@@ -10546,18 +10167,21 @@
               <a:rPr sz="2400" i="1" u="sng" dirty="0"/>
               <a:t>Common Types:</a:t>
             </a:r>
+            <a:endParaRPr sz="2400" i="1" u="sng" dirty="0"/>
           </a:p>
           <a:p>
             <a:r>
               <a:rPr sz="2400" dirty="0"/>
               <a:t>- Echo Request (Type 8) and Echo Reply (Type 0) for diagnostics.</a:t>
             </a:r>
+            <a:endParaRPr sz="2400" dirty="0"/>
           </a:p>
           <a:p>
             <a:r>
               <a:rPr sz="2400" dirty="0"/>
               <a:t>- Destination Unreachable, Time Exceeded for error reporting.</a:t>
             </a:r>
+            <a:endParaRPr sz="2400" dirty="0"/>
           </a:p>
         </p:txBody>
       </p:sp>
@@ -10609,20 +10233,14 @@
       </p:sp>
       <p:pic>
         <p:nvPicPr>
-          <p:cNvPr id="5" name="Picture 4">
-            <a:extLst>
-              <a:ext uri="{FF2B5EF4-FFF2-40B4-BE49-F238E27FC236}">
-                <a16:creationId xmlns:a16="http://schemas.microsoft.com/office/drawing/2014/main" id="{8BAFAB3F-C9D2-4A33-B918-AEE63F0F6274}"/>
-              </a:ext>
-            </a:extLst>
-          </p:cNvPr>
+          <p:cNvPr id="5" name="Picture 4"/>
           <p:cNvPicPr>
             <a:picLocks noChangeAspect="1"/>
           </p:cNvPicPr>
           <p:nvPr/>
         </p:nvPicPr>
         <p:blipFill>
-          <a:blip r:embed="rId3"/>
+          <a:blip r:embed="rId1"/>
           <a:stretch>
             <a:fillRect/>
           </a:stretch>
@@ -10681,12 +10299,14 @@
               <a:rPr dirty="0"/>
               <a:t>1. Interception: The attacker intercepts the communication.</a:t>
             </a:r>
+            <a:endParaRPr dirty="0"/>
           </a:p>
           <a:p>
             <a:r>
               <a:rPr dirty="0"/>
               <a:t>2. Manipulation: The data can be altered or observed.</a:t>
             </a:r>
+            <a:endParaRPr dirty="0"/>
           </a:p>
         </p:txBody>
       </p:sp>
@@ -10713,13 +10333,7 @@
       </p:sp>
       <p:sp>
         <p:nvSpPr>
-          <p:cNvPr id="4" name="Footer Placeholder 3">
-            <a:extLst>
-              <a:ext uri="{FF2B5EF4-FFF2-40B4-BE49-F238E27FC236}">
-                <a16:creationId xmlns:a16="http://schemas.microsoft.com/office/drawing/2014/main" id="{E5702E61-A12D-4D1A-B93B-E380D1AE3901}"/>
-              </a:ext>
-            </a:extLst>
-          </p:cNvPr>
+          <p:cNvPr id="4" name="Footer Placeholder 3"/>
           <p:cNvSpPr>
             <a:spLocks noGrp="1"/>
           </p:cNvSpPr>
@@ -10745,13 +10359,7 @@
       </p:sp>
       <p:sp>
         <p:nvSpPr>
-          <p:cNvPr id="5" name="Slide Number Placeholder 4">
-            <a:extLst>
-              <a:ext uri="{FF2B5EF4-FFF2-40B4-BE49-F238E27FC236}">
-                <a16:creationId xmlns:a16="http://schemas.microsoft.com/office/drawing/2014/main" id="{041829A8-2106-41C3-9101-644E0A8344C3}"/>
-              </a:ext>
-            </a:extLst>
-          </p:cNvPr>
+          <p:cNvPr id="5" name="Slide Number Placeholder 4"/>
           <p:cNvSpPr>
             <a:spLocks noGrp="1"/>
           </p:cNvSpPr>
@@ -10769,10 +10377,6 @@
             </a:pPr>
             <a:fld id="{5BC7FEBF-A170-470C-A369-F0D066FB58E5}" type="slidenum">
               <a:rPr lang="en-US" smtClean="0"/>
-              <a:pPr>
-                <a:defRPr/>
-              </a:pPr>
-              <a:t>3</a:t>
             </a:fld>
             <a:endParaRPr lang="en-US"/>
           </a:p>
@@ -10827,6 +10431,7 @@
               <a:rPr dirty="0"/>
               <a:t>Comparison with TCP and UDP</a:t>
             </a:r>
+            <a:endParaRPr dirty="0"/>
           </a:p>
         </p:txBody>
       </p:sp>
@@ -10854,6 +10459,7 @@
               <a:rPr sz="2800" i="1" u="sng" dirty="0"/>
               <a:t>ICMP:</a:t>
             </a:r>
+            <a:endParaRPr sz="2800" i="1" u="sng" dirty="0"/>
           </a:p>
           <a:p>
             <a:pPr lvl="1"/>
@@ -10861,6 +10467,7 @@
               <a:rPr sz="2400" dirty="0"/>
               <a:t>Stateless, no session establishment.</a:t>
             </a:r>
+            <a:endParaRPr sz="2400" dirty="0"/>
           </a:p>
           <a:p>
             <a:pPr lvl="1"/>
@@ -10868,6 +10475,7 @@
               <a:rPr sz="2400" dirty="0"/>
               <a:t>Used for control and diagnostics.</a:t>
             </a:r>
+            <a:endParaRPr sz="2400" dirty="0"/>
           </a:p>
           <a:p>
             <a:pPr marL="0" indent="0">
@@ -10877,6 +10485,7 @@
               <a:rPr sz="2800" i="1" u="sng" dirty="0"/>
               <a:t>UDP:</a:t>
             </a:r>
+            <a:endParaRPr sz="2800" i="1" u="sng" dirty="0"/>
           </a:p>
           <a:p>
             <a:pPr lvl="1"/>
@@ -10884,6 +10493,7 @@
               <a:rPr sz="2400" dirty="0"/>
               <a:t>Stateless, used for fast, connectionless communication.</a:t>
             </a:r>
+            <a:endParaRPr sz="2400" dirty="0"/>
           </a:p>
           <a:p>
             <a:pPr lvl="1"/>
@@ -10891,6 +10501,7 @@
               <a:rPr sz="2400" dirty="0"/>
               <a:t>May trigger ICMP responses (e.g., Destination Unreachable).</a:t>
             </a:r>
+            <a:endParaRPr sz="2400" dirty="0"/>
           </a:p>
           <a:p>
             <a:pPr marL="0" indent="0">
@@ -10900,6 +10511,7 @@
               <a:rPr sz="2800" i="1" u="sng" dirty="0"/>
               <a:t>TCP:</a:t>
             </a:r>
+            <a:endParaRPr sz="2800" i="1" u="sng" dirty="0"/>
           </a:p>
           <a:p>
             <a:pPr lvl="1"/>
@@ -10907,6 +10519,7 @@
               <a:rPr sz="2400" dirty="0"/>
               <a:t>Stateful, connection-oriented.</a:t>
             </a:r>
+            <a:endParaRPr sz="2400" dirty="0"/>
           </a:p>
           <a:p>
             <a:pPr lvl="1"/>
@@ -10914,6 +10527,7 @@
               <a:rPr sz="2400" dirty="0"/>
               <a:t>Vulnerable to SYN Floods due to reliance on connection buffers.</a:t>
             </a:r>
+            <a:endParaRPr sz="2400" dirty="0"/>
           </a:p>
         </p:txBody>
       </p:sp>
@@ -10976,18 +10590,13 @@
               <a:rPr dirty="0"/>
               <a:t>?</a:t>
             </a:r>
+            <a:endParaRPr dirty="0"/>
           </a:p>
         </p:txBody>
       </p:sp>
       <p:pic>
         <p:nvPicPr>
-          <p:cNvPr id="5" name="Content Placeholder 4">
-            <a:extLst>
-              <a:ext uri="{FF2B5EF4-FFF2-40B4-BE49-F238E27FC236}">
-                <a16:creationId xmlns:a16="http://schemas.microsoft.com/office/drawing/2014/main" id="{63CA491A-B5E7-4DBC-8CEA-42360241782B}"/>
-              </a:ext>
-            </a:extLst>
-          </p:cNvPr>
+          <p:cNvPr id="5" name="Content Placeholder 4"/>
           <p:cNvPicPr>
             <a:picLocks noGrp="1" noChangeAspect="1"/>
           </p:cNvPicPr>
@@ -10996,7 +10605,7 @@
           </p:nvPr>
         </p:nvPicPr>
         <p:blipFill>
-          <a:blip r:embed="rId2"/>
+          <a:blip r:embed="rId1"/>
           <a:stretch>
             <a:fillRect/>
           </a:stretch>
@@ -11009,11 +10618,6 @@
         </p:spPr>
       </p:pic>
     </p:spTree>
-    <p:extLst>
-      <p:ext uri="{BB962C8B-B14F-4D97-AF65-F5344CB8AC3E}">
-        <p14:creationId xmlns:p14="http://schemas.microsoft.com/office/powerpoint/2010/main" val="1826177006"/>
-      </p:ext>
-    </p:extLst>
   </p:cSld>
   <p:clrMapOvr>
     <a:masterClrMapping/>
@@ -11070,6 +10674,7 @@
               <a:rPr dirty="0"/>
               <a:t>?</a:t>
             </a:r>
+            <a:endParaRPr dirty="0"/>
           </a:p>
         </p:txBody>
       </p:sp>
@@ -11097,6 +10702,7 @@
               <a:rPr i="1" u="sng" dirty="0"/>
               <a:t>Definition:</a:t>
             </a:r>
+            <a:endParaRPr i="1" u="sng" dirty="0"/>
           </a:p>
           <a:p>
             <a:pPr algn="just"/>
@@ -11104,6 +10710,7 @@
               <a:rPr dirty="0"/>
               <a:t>A Denial-of-Service (DoS) attack where the attacker sends a large number of ICMP Echo Requests to overwhelm the target.</a:t>
             </a:r>
+            <a:endParaRPr dirty="0"/>
           </a:p>
           <a:p>
             <a:pPr marL="0" indent="0">
@@ -11113,6 +10720,7 @@
               <a:rPr i="1" u="sng" dirty="0"/>
               <a:t>Attack Mechanism:</a:t>
             </a:r>
+            <a:endParaRPr i="1" u="sng" dirty="0"/>
           </a:p>
           <a:p>
             <a:pPr algn="just"/>
@@ -11120,6 +10728,7 @@
               <a:rPr dirty="0"/>
               <a:t>Overloads the target with requests.</a:t>
             </a:r>
+            <a:endParaRPr dirty="0"/>
           </a:p>
           <a:p>
             <a:pPr algn="just"/>
@@ -11127,6 +10736,7 @@
               <a:rPr dirty="0"/>
               <a:t>Target responds with Echo Replies (if configured), consuming more resources.</a:t>
             </a:r>
+            <a:endParaRPr dirty="0"/>
           </a:p>
           <a:p>
             <a:pPr marL="0" indent="0">
@@ -11136,6 +10746,7 @@
               <a:rPr i="1" u="sng" dirty="0"/>
               <a:t>Objective:</a:t>
             </a:r>
+            <a:endParaRPr i="1" u="sng" dirty="0"/>
           </a:p>
           <a:p>
             <a:pPr algn="just"/>
@@ -11143,6 +10754,7 @@
               <a:rPr dirty="0"/>
               <a:t>Exhaust CPU resources (processing requests).</a:t>
             </a:r>
+            <a:endParaRPr dirty="0"/>
           </a:p>
           <a:p>
             <a:pPr algn="just"/>
@@ -11150,6 +10762,7 @@
               <a:rPr dirty="0"/>
               <a:t>Saturate network bandwidth.</a:t>
             </a:r>
+            <a:endParaRPr dirty="0"/>
           </a:p>
         </p:txBody>
       </p:sp>
@@ -11464,11 +11077,6 @@
         </p:txBody>
       </p:sp>
     </p:spTree>
-    <p:extLst>
-      <p:ext uri="{BB962C8B-B14F-4D97-AF65-F5344CB8AC3E}">
-        <p14:creationId xmlns:p14="http://schemas.microsoft.com/office/powerpoint/2010/main" val="82631048"/>
-      </p:ext>
-    </p:extLst>
   </p:cSld>
   <p:clrMapOvr>
     <a:masterClrMapping/>
@@ -11516,13 +11124,7 @@
       </p:sp>
       <p:graphicFrame>
         <p:nvGraphicFramePr>
-          <p:cNvPr id="4" name="Content Placeholder 3">
-            <a:extLst>
-              <a:ext uri="{FF2B5EF4-FFF2-40B4-BE49-F238E27FC236}">
-                <a16:creationId xmlns:a16="http://schemas.microsoft.com/office/drawing/2014/main" id="{6FEF8656-93C5-4300-880D-BE75487BC4D0}"/>
-              </a:ext>
-            </a:extLst>
-          </p:cNvPr>
+          <p:cNvPr id="4" name="Content Placeholder 3"/>
           <p:cNvGraphicFramePr>
             <a:graphicFrameLocks noGrp="1"/>
           </p:cNvGraphicFramePr>
@@ -11541,27 +11143,9 @@
                 <a:tableStyleId>{616DA210-FB5B-4158-B5E0-FEB733F419BA}</a:tableStyleId>
               </a:tblPr>
               <a:tblGrid>
-                <a:gridCol w="1643064">
-                  <a:extLst>
-                    <a:ext uri="{9D8B030D-6E8A-4147-A177-3AD203B41FA5}">
-                      <a16:colId xmlns:a16="http://schemas.microsoft.com/office/drawing/2014/main" val="2050689598"/>
-                    </a:ext>
-                  </a:extLst>
-                </a:gridCol>
-                <a:gridCol w="2319957">
-                  <a:extLst>
-                    <a:ext uri="{9D8B030D-6E8A-4147-A177-3AD203B41FA5}">
-                      <a16:colId xmlns:a16="http://schemas.microsoft.com/office/drawing/2014/main" val="318772573"/>
-                    </a:ext>
-                  </a:extLst>
-                </a:gridCol>
-                <a:gridCol w="4766642">
-                  <a:extLst>
-                    <a:ext uri="{9D8B030D-6E8A-4147-A177-3AD203B41FA5}">
-                      <a16:colId xmlns:a16="http://schemas.microsoft.com/office/drawing/2014/main" val="4229231730"/>
-                    </a:ext>
-                  </a:extLst>
-                </a:gridCol>
+                <a:gridCol w="1643064"/>
+                <a:gridCol w="2319957"/>
+                <a:gridCol w="4766642"/>
               </a:tblGrid>
               <a:tr h="322953">
                 <a:tc>
@@ -11581,7 +11165,7 @@
                           <a:srgbClr val="000000"/>
                         </a:solidFill>
                         <a:effectLst/>
-                        <a:latin typeface="Calibri" panose="020F0502020204030204" pitchFamily="34" charset="0"/>
+                        <a:latin typeface="Calibri" charset="0"/>
                       </a:endParaRPr>
                     </a:p>
                   </a:txBody>
@@ -11604,7 +11188,7 @@
                           <a:srgbClr val="000000"/>
                         </a:solidFill>
                         <a:effectLst/>
-                        <a:latin typeface="Calibri" panose="020F0502020204030204" pitchFamily="34" charset="0"/>
+                        <a:latin typeface="Calibri" charset="0"/>
                       </a:endParaRPr>
                     </a:p>
                   </a:txBody>
@@ -11627,17 +11211,12 @@
                           <a:srgbClr val="000000"/>
                         </a:solidFill>
                         <a:effectLst/>
-                        <a:latin typeface="Calibri" panose="020F0502020204030204" pitchFamily="34" charset="0"/>
+                        <a:latin typeface="Calibri" charset="0"/>
                       </a:endParaRPr>
                     </a:p>
                   </a:txBody>
                   <a:tcPr marL="9525" marR="9525" marT="9525" marB="0" anchor="ctr"/>
                 </a:tc>
-                <a:extLst>
-                  <a:ext uri="{0D108BD9-81ED-4DB2-BD59-A6C34878D82A}">
-                    <a16:rowId xmlns:a16="http://schemas.microsoft.com/office/drawing/2014/main" val="915412691"/>
-                  </a:ext>
-                </a:extLst>
               </a:tr>
               <a:tr h="968858">
                 <a:tc>
@@ -11657,7 +11236,7 @@
                           <a:srgbClr val="000000"/>
                         </a:solidFill>
                         <a:effectLst/>
-                        <a:latin typeface="Calibri" panose="020F0502020204030204" pitchFamily="34" charset="0"/>
+                        <a:latin typeface="Calibri" charset="0"/>
                       </a:endParaRPr>
                     </a:p>
                   </a:txBody>
@@ -11680,7 +11259,7 @@
                           <a:srgbClr val="000000"/>
                         </a:solidFill>
                         <a:effectLst/>
-                        <a:latin typeface="Calibri" panose="020F0502020204030204" pitchFamily="34" charset="0"/>
+                        <a:latin typeface="Calibri" charset="0"/>
                       </a:endParaRPr>
                     </a:p>
                   </a:txBody>
@@ -11703,17 +11282,12 @@
                           <a:srgbClr val="000000"/>
                         </a:solidFill>
                         <a:effectLst/>
-                        <a:latin typeface="Calibri" panose="020F0502020204030204" pitchFamily="34" charset="0"/>
+                        <a:latin typeface="Calibri" charset="0"/>
                       </a:endParaRPr>
                     </a:p>
                   </a:txBody>
                   <a:tcPr marL="9525" marR="9525" marT="9525" marB="0" anchor="ctr"/>
                 </a:tc>
-                <a:extLst>
-                  <a:ext uri="{0D108BD9-81ED-4DB2-BD59-A6C34878D82A}">
-                    <a16:rowId xmlns:a16="http://schemas.microsoft.com/office/drawing/2014/main" val="2668549643"/>
-                  </a:ext>
-                </a:extLst>
               </a:tr>
               <a:tr h="1291811">
                 <a:tc>
@@ -11733,7 +11307,7 @@
                           <a:srgbClr val="000000"/>
                         </a:solidFill>
                         <a:effectLst/>
-                        <a:latin typeface="Calibri" panose="020F0502020204030204" pitchFamily="34" charset="0"/>
+                        <a:latin typeface="Calibri" charset="0"/>
                       </a:endParaRPr>
                     </a:p>
                   </a:txBody>
@@ -11762,7 +11336,7 @@
                           <a:srgbClr val="000000"/>
                         </a:solidFill>
                         <a:effectLst/>
-                        <a:latin typeface="Calibri" panose="020F0502020204030204" pitchFamily="34" charset="0"/>
+                        <a:latin typeface="Calibri" charset="0"/>
                       </a:endParaRPr>
                     </a:p>
                   </a:txBody>
@@ -11821,17 +11395,12 @@
                           <a:srgbClr val="000000"/>
                         </a:solidFill>
                         <a:effectLst/>
-                        <a:latin typeface="Calibri" panose="020F0502020204030204" pitchFamily="34" charset="0"/>
+                        <a:latin typeface="Calibri" charset="0"/>
                       </a:endParaRPr>
                     </a:p>
                   </a:txBody>
                   <a:tcPr marL="9525" marR="9525" marT="9525" marB="0" anchor="ctr"/>
                 </a:tc>
-                <a:extLst>
-                  <a:ext uri="{0D108BD9-81ED-4DB2-BD59-A6C34878D82A}">
-                    <a16:rowId xmlns:a16="http://schemas.microsoft.com/office/drawing/2014/main" val="140064814"/>
-                  </a:ext>
-                </a:extLst>
               </a:tr>
               <a:tr h="1130335">
                 <a:tc>
@@ -11851,7 +11420,7 @@
                           <a:srgbClr val="000000"/>
                         </a:solidFill>
                         <a:effectLst/>
-                        <a:latin typeface="Calibri" panose="020F0502020204030204" pitchFamily="34" charset="0"/>
+                        <a:latin typeface="Calibri" charset="0"/>
                       </a:endParaRPr>
                     </a:p>
                   </a:txBody>
@@ -11880,7 +11449,7 @@
                           <a:srgbClr val="000000"/>
                         </a:solidFill>
                         <a:effectLst/>
-                        <a:latin typeface="Calibri" panose="020F0502020204030204" pitchFamily="34" charset="0"/>
+                        <a:latin typeface="Calibri" charset="0"/>
                       </a:endParaRPr>
                     </a:p>
                   </a:txBody>
@@ -11903,17 +11472,12 @@
                           <a:srgbClr val="000000"/>
                         </a:solidFill>
                         <a:effectLst/>
-                        <a:latin typeface="Calibri" panose="020F0502020204030204" pitchFamily="34" charset="0"/>
+                        <a:latin typeface="Calibri" charset="0"/>
                       </a:endParaRPr>
                     </a:p>
                   </a:txBody>
                   <a:tcPr marL="9525" marR="9525" marT="9525" marB="0" anchor="ctr"/>
                 </a:tc>
-                <a:extLst>
-                  <a:ext uri="{0D108BD9-81ED-4DB2-BD59-A6C34878D82A}">
-                    <a16:rowId xmlns:a16="http://schemas.microsoft.com/office/drawing/2014/main" val="3534945057"/>
-                  </a:ext>
-                </a:extLst>
               </a:tr>
             </a:tbl>
           </a:graphicData>
@@ -12065,18 +11629,21 @@
               <a:rPr i="1" u="sng" dirty="0"/>
               <a:t>Immediate Actions:</a:t>
             </a:r>
+            <a:endParaRPr i="1" u="sng" dirty="0"/>
           </a:p>
           <a:p>
             <a:r>
               <a:rPr dirty="0"/>
               <a:t>Rate-limit ICMP traffic.</a:t>
             </a:r>
+            <a:endParaRPr dirty="0"/>
           </a:p>
           <a:p>
             <a:r>
               <a:rPr dirty="0"/>
               <a:t>Block unnecessary ICMP packets using firewalls.</a:t>
             </a:r>
+            <a:endParaRPr dirty="0"/>
           </a:p>
           <a:p>
             <a:pPr marL="0" indent="0">
@@ -12086,18 +11653,21 @@
               <a:rPr i="1" u="sng" dirty="0"/>
               <a:t>Preventive Strategies:</a:t>
             </a:r>
+            <a:endParaRPr i="1" u="sng" dirty="0"/>
           </a:p>
           <a:p>
             <a:r>
               <a:rPr dirty="0"/>
               <a:t>Configure network devices to ignore Echo Requests from suspicious sources.</a:t>
             </a:r>
+            <a:endParaRPr dirty="0"/>
           </a:p>
           <a:p>
             <a:r>
               <a:rPr dirty="0"/>
               <a:t>Implement anti-DDoS solutions.</a:t>
             </a:r>
+            <a:endParaRPr dirty="0"/>
           </a:p>
           <a:p>
             <a:pPr marL="0" indent="0">
@@ -12107,18 +11677,21 @@
               <a:rPr i="1" u="sng" dirty="0"/>
               <a:t>Advanced Techniques:</a:t>
             </a:r>
+            <a:endParaRPr i="1" u="sng" dirty="0"/>
           </a:p>
           <a:p>
             <a:r>
               <a:rPr dirty="0"/>
               <a:t>Monitor traffic patterns for anomalies.</a:t>
             </a:r>
+            <a:endParaRPr dirty="0"/>
           </a:p>
           <a:p>
             <a:r>
               <a:rPr dirty="0"/>
               <a:t>Use Access Control Lists (ACLs) with strict filtering rules.</a:t>
             </a:r>
+            <a:endParaRPr dirty="0"/>
           </a:p>
         </p:txBody>
       </p:sp>
@@ -12525,11 +12098,6 @@
         </p:txBody>
       </p:sp>
     </p:spTree>
-    <p:extLst>
-      <p:ext uri="{BB962C8B-B14F-4D97-AF65-F5344CB8AC3E}">
-        <p14:creationId xmlns:p14="http://schemas.microsoft.com/office/powerpoint/2010/main" val="3604576207"/>
-      </p:ext>
-    </p:extLst>
   </p:cSld>
   <p:clrMapOvr>
     <a:masterClrMapping/>
@@ -12610,11 +12178,6 @@
         </p:txBody>
       </p:sp>
     </p:spTree>
-    <p:extLst>
-      <p:ext uri="{BB962C8B-B14F-4D97-AF65-F5344CB8AC3E}">
-        <p14:creationId xmlns:p14="http://schemas.microsoft.com/office/powerpoint/2010/main" val="1512154888"/>
-      </p:ext>
-    </p:extLst>
   </p:cSld>
   <p:clrMapOvr>
     <a:masterClrMapping/>
@@ -12674,6 +12237,7 @@
               <a:rPr dirty="0"/>
               <a:t>Impersonating a MAC address to intercept packets.</a:t>
             </a:r>
+            <a:endParaRPr dirty="0"/>
           </a:p>
           <a:p>
             <a:pPr marL="514350" indent="-514350">
@@ -12684,6 +12248,7 @@
               <a:rPr dirty="0"/>
               <a:t>- DNS Spoofing: Altering DNS responses to redirect traffic.</a:t>
             </a:r>
+            <a:endParaRPr dirty="0"/>
           </a:p>
           <a:p>
             <a:pPr marL="514350" indent="-514350">
@@ -12694,6 +12259,7 @@
               <a:rPr dirty="0"/>
               <a:t>- Rogue Wi-Fi: Setting up fraudulent Wi-Fi access points.</a:t>
             </a:r>
+            <a:endParaRPr dirty="0"/>
           </a:p>
         </p:txBody>
       </p:sp>
@@ -12720,13 +12286,7 @@
       </p:sp>
       <p:sp>
         <p:nvSpPr>
-          <p:cNvPr id="4" name="Footer Placeholder 3">
-            <a:extLst>
-              <a:ext uri="{FF2B5EF4-FFF2-40B4-BE49-F238E27FC236}">
-                <a16:creationId xmlns:a16="http://schemas.microsoft.com/office/drawing/2014/main" id="{3C7F3124-09A6-47EB-8DF7-69174B32AFD3}"/>
-              </a:ext>
-            </a:extLst>
-          </p:cNvPr>
+          <p:cNvPr id="4" name="Footer Placeholder 3"/>
           <p:cNvSpPr>
             <a:spLocks noGrp="1"/>
           </p:cNvSpPr>
@@ -12752,13 +12312,7 @@
       </p:sp>
       <p:sp>
         <p:nvSpPr>
-          <p:cNvPr id="5" name="Slide Number Placeholder 4">
-            <a:extLst>
-              <a:ext uri="{FF2B5EF4-FFF2-40B4-BE49-F238E27FC236}">
-                <a16:creationId xmlns:a16="http://schemas.microsoft.com/office/drawing/2014/main" id="{D40744FB-4FE4-4AAF-928C-4452C5B63CDD}"/>
-              </a:ext>
-            </a:extLst>
-          </p:cNvPr>
+          <p:cNvPr id="5" name="Slide Number Placeholder 4"/>
           <p:cNvSpPr>
             <a:spLocks noGrp="1"/>
           </p:cNvSpPr>
@@ -12776,10 +12330,6 @@
             </a:pPr>
             <a:fld id="{5BC7FEBF-A170-470C-A369-F0D066FB58E5}" type="slidenum">
               <a:rPr lang="en-US" smtClean="0"/>
-              <a:pPr>
-                <a:defRPr/>
-              </a:pPr>
-              <a:t>4</a:t>
             </a:fld>
             <a:endParaRPr lang="en-US"/>
           </a:p>
@@ -12833,6 +12383,7 @@
               <a:rPr dirty="0"/>
               <a:t>- Data theft: Sensitive information such as passwords.</a:t>
             </a:r>
+            <a:endParaRPr dirty="0"/>
           </a:p>
           <a:p>
             <a:pPr marL="514350" indent="-514350">
@@ -12843,6 +12394,7 @@
               <a:rPr dirty="0"/>
               <a:t>- Espionage: Monitoring user activity.</a:t>
             </a:r>
+            <a:endParaRPr dirty="0"/>
           </a:p>
           <a:p>
             <a:pPr marL="514350" indent="-514350">
@@ -12853,6 +12405,7 @@
               <a:rPr dirty="0"/>
               <a:t>- Data manipulation: Modifying messages or transactions.</a:t>
             </a:r>
+            <a:endParaRPr dirty="0"/>
           </a:p>
         </p:txBody>
       </p:sp>
@@ -12879,13 +12432,7 @@
       </p:sp>
       <p:sp>
         <p:nvSpPr>
-          <p:cNvPr id="4" name="Footer Placeholder 3">
-            <a:extLst>
-              <a:ext uri="{FF2B5EF4-FFF2-40B4-BE49-F238E27FC236}">
-                <a16:creationId xmlns:a16="http://schemas.microsoft.com/office/drawing/2014/main" id="{67427C75-862B-43D9-97DD-F022B243077D}"/>
-              </a:ext>
-            </a:extLst>
-          </p:cNvPr>
+          <p:cNvPr id="4" name="Footer Placeholder 3"/>
           <p:cNvSpPr>
             <a:spLocks noGrp="1"/>
           </p:cNvSpPr>
@@ -12911,13 +12458,7 @@
       </p:sp>
       <p:sp>
         <p:nvSpPr>
-          <p:cNvPr id="5" name="Slide Number Placeholder 4">
-            <a:extLst>
-              <a:ext uri="{FF2B5EF4-FFF2-40B4-BE49-F238E27FC236}">
-                <a16:creationId xmlns:a16="http://schemas.microsoft.com/office/drawing/2014/main" id="{C5E61BA8-5F8C-4816-A05D-367071BC9C76}"/>
-              </a:ext>
-            </a:extLst>
-          </p:cNvPr>
+          <p:cNvPr id="5" name="Slide Number Placeholder 4"/>
           <p:cNvSpPr>
             <a:spLocks noGrp="1"/>
           </p:cNvSpPr>
@@ -12935,10 +12476,6 @@
             </a:pPr>
             <a:fld id="{5BC7FEBF-A170-470C-A369-F0D066FB58E5}" type="slidenum">
               <a:rPr lang="en-US" smtClean="0"/>
-              <a:pPr>
-                <a:defRPr/>
-              </a:pPr>
-              <a:t>5</a:t>
             </a:fld>
             <a:endParaRPr lang="en-US"/>
           </a:p>
@@ -13021,13 +12558,7 @@
       </p:sp>
       <p:sp>
         <p:nvSpPr>
-          <p:cNvPr id="4" name="Footer Placeholder 3">
-            <a:extLst>
-              <a:ext uri="{FF2B5EF4-FFF2-40B4-BE49-F238E27FC236}">
-                <a16:creationId xmlns:a16="http://schemas.microsoft.com/office/drawing/2014/main" id="{67427C75-862B-43D9-97DD-F022B243077D}"/>
-              </a:ext>
-            </a:extLst>
-          </p:cNvPr>
+          <p:cNvPr id="4" name="Footer Placeholder 3"/>
           <p:cNvSpPr>
             <a:spLocks noGrp="1"/>
           </p:cNvSpPr>
@@ -13053,13 +12584,7 @@
       </p:sp>
       <p:sp>
         <p:nvSpPr>
-          <p:cNvPr id="5" name="Slide Number Placeholder 4">
-            <a:extLst>
-              <a:ext uri="{FF2B5EF4-FFF2-40B4-BE49-F238E27FC236}">
-                <a16:creationId xmlns:a16="http://schemas.microsoft.com/office/drawing/2014/main" id="{C5E61BA8-5F8C-4816-A05D-367071BC9C76}"/>
-              </a:ext>
-            </a:extLst>
-          </p:cNvPr>
+          <p:cNvPr id="5" name="Slide Number Placeholder 4"/>
           <p:cNvSpPr>
             <a:spLocks noGrp="1"/>
           </p:cNvSpPr>
@@ -13077,21 +12602,12 @@
             </a:pPr>
             <a:fld id="{5BC7FEBF-A170-470C-A369-F0D066FB58E5}" type="slidenum">
               <a:rPr lang="en-US" smtClean="0"/>
-              <a:pPr>
-                <a:defRPr/>
-              </a:pPr>
-              <a:t>6</a:t>
             </a:fld>
             <a:endParaRPr lang="en-US"/>
           </a:p>
         </p:txBody>
       </p:sp>
     </p:spTree>
-    <p:extLst>
-      <p:ext uri="{BB962C8B-B14F-4D97-AF65-F5344CB8AC3E}">
-        <p14:creationId xmlns:p14="http://schemas.microsoft.com/office/powerpoint/2010/main" val="2712405406"/>
-      </p:ext>
-    </p:extLst>
   </p:cSld>
   <p:clrMapOvr>
     <a:masterClrMapping/>
@@ -13218,6 +12734,7 @@
               <a:rPr dirty="0"/>
               <a:t> one of them.</a:t>
             </a:r>
+            <a:endParaRPr dirty="0"/>
           </a:p>
           <a:p>
             <a:endParaRPr dirty="0"/>
@@ -13227,6 +12744,7 @@
               <a:rPr dirty="0"/>
               <a:t>The attacker gains unauthorized access to the session, potentially stealing data or injecting malicious commands.</a:t>
             </a:r>
+            <a:endParaRPr dirty="0"/>
           </a:p>
         </p:txBody>
       </p:sp>
@@ -13295,12 +12813,14 @@
               <a:rPr dirty="0"/>
               <a:t>1. Session Sniffing: The attacker monitors the network to capture the session ID.</a:t>
             </a:r>
+            <a:endParaRPr dirty="0"/>
           </a:p>
           <a:p>
             <a:r>
               <a:rPr dirty="0"/>
               <a:t>2. Sequence Prediction: Predicting TCP sequence numbers to inject packets.</a:t>
             </a:r>
+            <a:endParaRPr dirty="0"/>
           </a:p>
           <a:p>
             <a:r>
@@ -13319,6 +12839,7 @@
               <a:rPr dirty="0"/>
               <a:t> packets to take control of the session.</a:t>
             </a:r>
+            <a:endParaRPr dirty="0"/>
           </a:p>
           <a:p>
             <a:endParaRPr dirty="0"/>
@@ -13328,6 +12849,7 @@
               <a:rPr dirty="0"/>
               <a:t>Requires the attacker to be on the same network or have access to the traffic.</a:t>
             </a:r>
+            <a:endParaRPr dirty="0"/>
           </a:p>
         </p:txBody>
       </p:sp>
@@ -13350,6 +12872,7 @@
               <a:rPr sz="4000" dirty="0"/>
               <a:t>How Does TCP Session Hijacking Work?</a:t>
             </a:r>
+            <a:endParaRPr sz="4000" dirty="0"/>
           </a:p>
         </p:txBody>
       </p:sp>
@@ -13677,7 +13200,11 @@
       </a:style>
     </a:lnDef>
   </a:objectDefaults>
-  <a:extraClrSchemeLst/>
+  <a:extLst>
+    <a:ext uri="{05A4C25C-085E-4340-85A3-A5531E510DB2}">
+      <thm15:themeFamily xmlns:thm15="http://schemas.microsoft.com/office/thememl/2012/main" name="Office Theme" id="{62F939B6-93AF-4DB8-9C6B-D6C7DFDC589F}" vid="{4A3C46E8-61CC-4603-A589-7422A47A8E4A}"/>
+    </a:ext>
+  </a:extLst>
 </a:theme>
 </file>
 
@@ -13724,7 +13251,7 @@
     </a:clrScheme>
     <a:fontScheme name="Office">
       <a:majorFont>
-        <a:latin typeface="Calibri Light" panose="020F0302020204030204"/>
+        <a:latin typeface="Calibri Light"/>
         <a:ea typeface=""/>
         <a:cs typeface=""/>
         <a:font script="Jpan" typeface="游ゴシック Light"/>
@@ -13757,26 +13284,9 @@
         <a:font script="Viet" typeface="Times New Roman"/>
         <a:font script="Uigh" typeface="Microsoft Uighur"/>
         <a:font script="Geor" typeface="Sylfaen"/>
-        <a:font script="Armn" typeface="Arial"/>
-        <a:font script="Bugi" typeface="Leelawadee UI"/>
-        <a:font script="Bopo" typeface="Microsoft JhengHei"/>
-        <a:font script="Java" typeface="Javanese Text"/>
-        <a:font script="Lisu" typeface="Segoe UI"/>
-        <a:font script="Mymr" typeface="Myanmar Text"/>
-        <a:font script="Nkoo" typeface="Ebrima"/>
-        <a:font script="Olck" typeface="Nirmala UI"/>
-        <a:font script="Osma" typeface="Ebrima"/>
-        <a:font script="Phag" typeface="Phagspa"/>
-        <a:font script="Syrn" typeface="Estrangelo Edessa"/>
-        <a:font script="Syrj" typeface="Estrangelo Edessa"/>
-        <a:font script="Syre" typeface="Estrangelo Edessa"/>
-        <a:font script="Sora" typeface="Nirmala UI"/>
-        <a:font script="Tale" typeface="Microsoft Tai Le"/>
-        <a:font script="Talu" typeface="Microsoft New Tai Lue"/>
-        <a:font script="Tfng" typeface="Ebrima"/>
       </a:majorFont>
       <a:minorFont>
-        <a:latin typeface="Calibri" panose="020F0502020204030204"/>
+        <a:latin typeface="Calibri"/>
         <a:ea typeface=""/>
         <a:cs typeface=""/>
         <a:font script="Jpan" typeface="游ゴシック"/>
@@ -13809,23 +13319,6 @@
         <a:font script="Viet" typeface="Arial"/>
         <a:font script="Uigh" typeface="Microsoft Uighur"/>
         <a:font script="Geor" typeface="Sylfaen"/>
-        <a:font script="Armn" typeface="Arial"/>
-        <a:font script="Bugi" typeface="Leelawadee UI"/>
-        <a:font script="Bopo" typeface="Microsoft JhengHei"/>
-        <a:font script="Java" typeface="Javanese Text"/>
-        <a:font script="Lisu" typeface="Segoe UI"/>
-        <a:font script="Mymr" typeface="Myanmar Text"/>
-        <a:font script="Nkoo" typeface="Ebrima"/>
-        <a:font script="Olck" typeface="Nirmala UI"/>
-        <a:font script="Osma" typeface="Ebrima"/>
-        <a:font script="Phag" typeface="Phagspa"/>
-        <a:font script="Syrn" typeface="Estrangelo Edessa"/>
-        <a:font script="Syrj" typeface="Estrangelo Edessa"/>
-        <a:font script="Syre" typeface="Estrangelo Edessa"/>
-        <a:font script="Sora" typeface="Nirmala UI"/>
-        <a:font script="Tale" typeface="Microsoft Tai Le"/>
-        <a:font script="Talu" typeface="Microsoft New Tai Lue"/>
-        <a:font script="Tfng" typeface="Ebrima"/>
       </a:minorFont>
     </a:fontScheme>
     <a:fmtScheme name="Office">
@@ -13966,8 +13459,6 @@
       </a:bgFillStyleLst>
     </a:fmtScheme>
   </a:themeElements>
-  <a:objectDefaults/>
-  <a:extraClrSchemeLst/>
   <a:extLst>
     <a:ext uri="{05A4C25C-085E-4340-85A3-A5531E510DB2}">
       <thm15:themeFamily xmlns:thm15="http://schemas.microsoft.com/office/thememl/2012/main" name="Office Theme" id="{62F939B6-93AF-4DB8-9C6B-D6C7DFDC589F}" vid="{4A3C46E8-61CC-4603-A589-7422A47A8E4A}"/>
